--- a/assets/figures-editable/c1-c2/c2-e01.pptx
+++ b/assets/figures-editable/c1-c2/c2-e01.pptx
@@ -7,7 +7,7 @@
   <p:sldIdLst>
     <p:sldId id="256" r:id="rId7"/>
   </p:sldIdLst>
-  <p:sldSz cx="11948160" cy="7924799" type="screen4x3"/>
+  <p:sldSz cx="12191695" cy="6858000" type="screen4x3"/>
   <p:notesSz cx="6858000" cy="9144000"/>
   <p:defaultTextStyle>
     <a:defPPr>
@@ -3098,14 +3098,14 @@
       <p:grpSpPr/>
       <p:sp>
         <p:nvSpPr>
-          <p:cNvPr id="2" name="text1" descr="sci-ppt:C2-E01-001"/>
+          <p:cNvPr id="2" name="C2-E01 text 0" descr="sci-ppt:o000"/>
           <p:cNvSpPr txBox="1"/>
           <p:nvPr/>
         </p:nvSpPr>
         <p:spPr>
           <a:xfrm>
-            <a:off x="316992" y="268224"/>
-            <a:ext cx="11277600" cy="359054"/>
+            <a:off x="274320" y="118872"/>
+            <a:ext cx="11612880" cy="340105"/>
           </a:xfrm>
           <a:prstGeom prst="rect">
             <a:avLst/>
@@ -3114,7 +3114,7 @@
           <a:effectLst/>
         </p:spPr>
         <p:txBody>
-          <a:bodyPr wrap="none" lIns="27432" rIns="27432" tIns="18288" bIns="18288" anchor="ctr">
+          <a:bodyPr wrap="none" lIns="18288" rIns="18288" tIns="18288" bIns="18288" anchor="t">
             <a:spAutoFit/>
           </a:bodyPr>
           <a:lstStyle/>
@@ -3125,111 +3125,1127 @@
               </a:spcAft>
             </a:pPr>
             <a:r>
-              <a:rPr sz="1823" b="0" i="0">
+              <a:rPr sz="1900" b="1" i="0">
                 <a:solidFill>
                   <a:srgbClr val="8EDBD4"/>
                 </a:solidFill>
                 <a:latin typeface="Arial"/>
               </a:rPr>
-              <a:t>C2-E01 | Physical-variable diagram</a:t>
-            </a:r>
-          </a:p>
-        </p:txBody>
-      </p:sp>
-      <p:sp>
-        <p:nvSpPr>
-          <p:cNvPr id="3" name="ellipse2" descr="sci-ppt:C2-E01-002"/>
+              <a:t>C2-E01 · Prescribed optical profile</a:t>
+            </a:r>
+          </a:p>
+        </p:txBody>
+      </p:sp>
+      <p:sp>
+        <p:nvSpPr>
+          <p:cNvPr id="3" name="C2-E01 round_rect 1" descr="sci-ppt:o001"/>
           <p:cNvSpPr/>
           <p:nvPr/>
         </p:nvSpPr>
         <p:spPr>
           <a:xfrm>
-            <a:off x="1402080" y="1341120"/>
-            <a:ext cx="2560320" cy="2560320"/>
+            <a:off x="365760" y="914400"/>
+            <a:ext cx="4206240" cy="4846320"/>
+          </a:xfrm>
+          <a:prstGeom prst="roundRect">
+            <a:avLst/>
+          </a:prstGeom>
+          <a:solidFill>
+            <a:srgbClr val="213E4B"/>
+          </a:solidFill>
+          <a:ln w="20320">
+            <a:solidFill>
+              <a:srgbClr val="8EDBD4"/>
+            </a:solidFill>
+          </a:ln>
+          <a:effectLst/>
+        </p:spPr>
+        <p:txBody>
+          <a:bodyPr rtlCol="0" anchor="ctr"/>
+          <a:lstStyle/>
+          <a:p>
+            <a:pPr algn="ctr"/>
+          </a:p>
+        </p:txBody>
+      </p:sp>
+      <p:sp>
+        <p:nvSpPr>
+          <p:cNvPr id="4" name="C2-E01 text 2" descr="sci-ppt:o002"/>
+          <p:cNvSpPr txBox="1"/>
+          <p:nvPr/>
+        </p:nvSpPr>
+        <p:spPr>
+          <a:xfrm>
+            <a:off x="475488" y="969264"/>
+            <a:ext cx="3986783" cy="254889"/>
+          </a:xfrm>
+          <a:prstGeom prst="rect">
+            <a:avLst/>
+          </a:prstGeom>
+          <a:noFill/>
+          <a:effectLst/>
+        </p:spPr>
+        <p:txBody>
+          <a:bodyPr wrap="none" lIns="18288" rIns="18288" tIns="18288" bIns="18288" anchor="t">
+            <a:spAutoFit/>
+          </a:bodyPr>
+          <a:lstStyle/>
+          <a:p>
+            <a:pPr algn="l">
+              <a:spcAft>
+                <a:spcPts val="0"/>
+              </a:spcAft>
+            </a:pPr>
+            <a:r>
+              <a:rPr sz="1350" b="1" i="0">
+                <a:solidFill>
+                  <a:srgbClr val="8EDBD4"/>
+                </a:solidFill>
+                <a:latin typeface="Arial"/>
+              </a:rPr>
+              <a:t>Beam spot on the target</a:t>
+            </a:r>
+          </a:p>
+        </p:txBody>
+      </p:sp>
+      <p:sp>
+        <p:nvSpPr>
+          <p:cNvPr id="5" name="C2-E01 ellipse 3" descr="sci-ppt:o003"/>
+          <p:cNvSpPr/>
+          <p:nvPr/>
+        </p:nvSpPr>
+        <p:spPr>
+          <a:xfrm>
+            <a:off x="731520" y="1645920"/>
+            <a:ext cx="3474720" cy="3474720"/>
+          </a:xfrm>
+          <a:prstGeom prst="ellipse">
+            <a:avLst/>
+          </a:prstGeom>
+          <a:solidFill>
+            <a:srgbClr val="8EDBD4">
+              <a:alpha val="5000"/>
+            </a:srgbClr>
+          </a:solidFill>
+          <a:ln>
+            <a:solidFill>
+              <a:srgbClr val="8EDBD4">
+                <a:alpha val="5000"/>
+              </a:srgbClr>
+            </a:solidFill>
+          </a:ln>
+          <a:effectLst/>
+        </p:spPr>
+        <p:txBody>
+          <a:bodyPr rtlCol="0" anchor="ctr"/>
+          <a:lstStyle/>
+          <a:p>
+            <a:pPr algn="ctr"/>
+          </a:p>
+        </p:txBody>
+      </p:sp>
+      <p:sp>
+        <p:nvSpPr>
+          <p:cNvPr id="6" name="C2-E01 ellipse 4" descr="sci-ppt:o004"/>
+          <p:cNvSpPr/>
+          <p:nvPr/>
+        </p:nvSpPr>
+        <p:spPr>
+          <a:xfrm>
+            <a:off x="810490" y="1724890"/>
+            <a:ext cx="3316778" cy="3316778"/>
+          </a:xfrm>
+          <a:prstGeom prst="ellipse">
+            <a:avLst/>
+          </a:prstGeom>
+          <a:solidFill>
+            <a:srgbClr val="8EDBD4">
+              <a:alpha val="5000"/>
+            </a:srgbClr>
+          </a:solidFill>
+          <a:ln>
+            <a:solidFill>
+              <a:srgbClr val="8EDBD4">
+                <a:alpha val="5000"/>
+              </a:srgbClr>
+            </a:solidFill>
+          </a:ln>
+          <a:effectLst/>
+        </p:spPr>
+        <p:txBody>
+          <a:bodyPr rtlCol="0" anchor="ctr"/>
+          <a:lstStyle/>
+          <a:p>
+            <a:pPr algn="ctr"/>
+          </a:p>
+        </p:txBody>
+      </p:sp>
+      <p:sp>
+        <p:nvSpPr>
+          <p:cNvPr id="7" name="C2-E01 ellipse 5" descr="sci-ppt:o005"/>
+          <p:cNvSpPr/>
+          <p:nvPr/>
+        </p:nvSpPr>
+        <p:spPr>
+          <a:xfrm>
+            <a:off x="889461" y="1803861"/>
+            <a:ext cx="3158836" cy="3158836"/>
+          </a:xfrm>
+          <a:prstGeom prst="ellipse">
+            <a:avLst/>
+          </a:prstGeom>
+          <a:solidFill>
+            <a:srgbClr val="8EDBD4">
+              <a:alpha val="5000"/>
+            </a:srgbClr>
+          </a:solidFill>
+          <a:ln>
+            <a:solidFill>
+              <a:srgbClr val="8EDBD4">
+                <a:alpha val="5000"/>
+              </a:srgbClr>
+            </a:solidFill>
+          </a:ln>
+          <a:effectLst/>
+        </p:spPr>
+        <p:txBody>
+          <a:bodyPr rtlCol="0" anchor="ctr"/>
+          <a:lstStyle/>
+          <a:p>
+            <a:pPr algn="ctr"/>
+          </a:p>
+        </p:txBody>
+      </p:sp>
+      <p:sp>
+        <p:nvSpPr>
+          <p:cNvPr id="8" name="C2-E01 ellipse 6" descr="sci-ppt:o006"/>
+          <p:cNvSpPr/>
+          <p:nvPr/>
+        </p:nvSpPr>
+        <p:spPr>
+          <a:xfrm>
+            <a:off x="968432" y="1882832"/>
+            <a:ext cx="3000894" cy="3000894"/>
+          </a:xfrm>
+          <a:prstGeom prst="ellipse">
+            <a:avLst/>
+          </a:prstGeom>
+          <a:solidFill>
+            <a:srgbClr val="8EDBD4">
+              <a:alpha val="5000"/>
+            </a:srgbClr>
+          </a:solidFill>
+          <a:ln>
+            <a:solidFill>
+              <a:srgbClr val="8EDBD4">
+                <a:alpha val="5000"/>
+              </a:srgbClr>
+            </a:solidFill>
+          </a:ln>
+          <a:effectLst/>
+        </p:spPr>
+        <p:txBody>
+          <a:bodyPr rtlCol="0" anchor="ctr"/>
+          <a:lstStyle/>
+          <a:p>
+            <a:pPr algn="ctr"/>
+          </a:p>
+        </p:txBody>
+      </p:sp>
+      <p:sp>
+        <p:nvSpPr>
+          <p:cNvPr id="9" name="C2-E01 ellipse 7" descr="sci-ppt:o007"/>
+          <p:cNvSpPr/>
+          <p:nvPr/>
+        </p:nvSpPr>
+        <p:spPr>
+          <a:xfrm>
+            <a:off x="1047403" y="1961803"/>
+            <a:ext cx="2842952" cy="2842952"/>
+          </a:xfrm>
+          <a:prstGeom prst="ellipse">
+            <a:avLst/>
+          </a:prstGeom>
+          <a:solidFill>
+            <a:srgbClr val="8EDBD4">
+              <a:alpha val="5000"/>
+            </a:srgbClr>
+          </a:solidFill>
+          <a:ln>
+            <a:solidFill>
+              <a:srgbClr val="8EDBD4">
+                <a:alpha val="5000"/>
+              </a:srgbClr>
+            </a:solidFill>
+          </a:ln>
+          <a:effectLst/>
+        </p:spPr>
+        <p:txBody>
+          <a:bodyPr rtlCol="0" anchor="ctr"/>
+          <a:lstStyle/>
+          <a:p>
+            <a:pPr algn="ctr"/>
+          </a:p>
+        </p:txBody>
+      </p:sp>
+      <p:sp>
+        <p:nvSpPr>
+          <p:cNvPr id="10" name="C2-E01 ellipse 8" descr="sci-ppt:o008"/>
+          <p:cNvSpPr/>
+          <p:nvPr/>
+        </p:nvSpPr>
+        <p:spPr>
+          <a:xfrm>
+            <a:off x="1126374" y="2040774"/>
+            <a:ext cx="2685010" cy="2685010"/>
+          </a:xfrm>
+          <a:prstGeom prst="ellipse">
+            <a:avLst/>
+          </a:prstGeom>
+          <a:solidFill>
+            <a:srgbClr val="8EDBD4">
+              <a:alpha val="5000"/>
+            </a:srgbClr>
+          </a:solidFill>
+          <a:ln>
+            <a:solidFill>
+              <a:srgbClr val="8EDBD4">
+                <a:alpha val="5000"/>
+              </a:srgbClr>
+            </a:solidFill>
+          </a:ln>
+          <a:effectLst/>
+        </p:spPr>
+        <p:txBody>
+          <a:bodyPr rtlCol="0" anchor="ctr"/>
+          <a:lstStyle/>
+          <a:p>
+            <a:pPr algn="ctr"/>
+          </a:p>
+        </p:txBody>
+      </p:sp>
+      <p:sp>
+        <p:nvSpPr>
+          <p:cNvPr id="11" name="C2-E01 ellipse 9" descr="sci-ppt:o009"/>
+          <p:cNvSpPr/>
+          <p:nvPr/>
+        </p:nvSpPr>
+        <p:spPr>
+          <a:xfrm>
+            <a:off x="1205345" y="2119745"/>
+            <a:ext cx="2527069" cy="2527069"/>
+          </a:xfrm>
+          <a:prstGeom prst="ellipse">
+            <a:avLst/>
+          </a:prstGeom>
+          <a:solidFill>
+            <a:srgbClr val="8EDBD4">
+              <a:alpha val="5641"/>
+            </a:srgbClr>
+          </a:solidFill>
+          <a:ln>
+            <a:solidFill>
+              <a:srgbClr val="8EDBD4">
+                <a:alpha val="5641"/>
+              </a:srgbClr>
+            </a:solidFill>
+          </a:ln>
+          <a:effectLst/>
+        </p:spPr>
+        <p:txBody>
+          <a:bodyPr rtlCol="0" anchor="ctr"/>
+          <a:lstStyle/>
+          <a:p>
+            <a:pPr algn="ctr"/>
+          </a:p>
+        </p:txBody>
+      </p:sp>
+      <p:sp>
+        <p:nvSpPr>
+          <p:cNvPr id="12" name="C2-E01 ellipse 10" descr="sci-ppt:o010"/>
+          <p:cNvSpPr/>
+          <p:nvPr/>
+        </p:nvSpPr>
+        <p:spPr>
+          <a:xfrm>
+            <a:off x="1284316" y="2198716"/>
+            <a:ext cx="2369127" cy="2369127"/>
+          </a:xfrm>
+          <a:prstGeom prst="ellipse">
+            <a:avLst/>
+          </a:prstGeom>
+          <a:solidFill>
+            <a:srgbClr val="8EDBD4">
+              <a:alpha val="7777"/>
+            </a:srgbClr>
+          </a:solidFill>
+          <a:ln>
+            <a:solidFill>
+              <a:srgbClr val="8EDBD4">
+                <a:alpha val="7777"/>
+              </a:srgbClr>
+            </a:solidFill>
+          </a:ln>
+          <a:effectLst/>
+        </p:spPr>
+        <p:txBody>
+          <a:bodyPr rtlCol="0" anchor="ctr"/>
+          <a:lstStyle/>
+          <a:p>
+            <a:pPr algn="ctr"/>
+          </a:p>
+        </p:txBody>
+      </p:sp>
+      <p:sp>
+        <p:nvSpPr>
+          <p:cNvPr id="13" name="C2-E01 ellipse 11" descr="sci-ppt:o011"/>
+          <p:cNvSpPr/>
+          <p:nvPr/>
+        </p:nvSpPr>
+        <p:spPr>
+          <a:xfrm>
+            <a:off x="1363287" y="2277687"/>
+            <a:ext cx="2211185" cy="2211185"/>
+          </a:xfrm>
+          <a:prstGeom prst="ellipse">
+            <a:avLst/>
+          </a:prstGeom>
+          <a:solidFill>
+            <a:srgbClr val="8EDBD4">
+              <a:alpha val="10502"/>
+            </a:srgbClr>
+          </a:solidFill>
+          <a:ln>
+            <a:solidFill>
+              <a:srgbClr val="8EDBD4">
+                <a:alpha val="10502"/>
+              </a:srgbClr>
+            </a:solidFill>
+          </a:ln>
+          <a:effectLst/>
+        </p:spPr>
+        <p:txBody>
+          <a:bodyPr rtlCol="0" anchor="ctr"/>
+          <a:lstStyle/>
+          <a:p>
+            <a:pPr algn="ctr"/>
+          </a:p>
+        </p:txBody>
+      </p:sp>
+      <p:sp>
+        <p:nvSpPr>
+          <p:cNvPr id="14" name="C2-E01 ellipse 12" descr="sci-ppt:o012"/>
+          <p:cNvSpPr/>
+          <p:nvPr/>
+        </p:nvSpPr>
+        <p:spPr>
+          <a:xfrm>
+            <a:off x="1442258" y="2356658"/>
+            <a:ext cx="2053243" cy="2053243"/>
+          </a:xfrm>
+          <a:prstGeom prst="ellipse">
+            <a:avLst/>
+          </a:prstGeom>
+          <a:solidFill>
+            <a:srgbClr val="8EDBD4">
+              <a:alpha val="13892"/>
+            </a:srgbClr>
+          </a:solidFill>
+          <a:ln>
+            <a:solidFill>
+              <a:srgbClr val="8EDBD4">
+                <a:alpha val="13892"/>
+              </a:srgbClr>
+            </a:solidFill>
+          </a:ln>
+          <a:effectLst/>
+        </p:spPr>
+        <p:txBody>
+          <a:bodyPr rtlCol="0" anchor="ctr"/>
+          <a:lstStyle/>
+          <a:p>
+            <a:pPr algn="ctr"/>
+          </a:p>
+        </p:txBody>
+      </p:sp>
+      <p:sp>
+        <p:nvSpPr>
+          <p:cNvPr id="15" name="C2-E01 ellipse 13" descr="sci-ppt:o013"/>
+          <p:cNvSpPr/>
+          <p:nvPr/>
+        </p:nvSpPr>
+        <p:spPr>
+          <a:xfrm>
+            <a:off x="1521229" y="2435629"/>
+            <a:ext cx="1895301" cy="1895301"/>
+          </a:xfrm>
+          <a:prstGeom prst="ellipse">
+            <a:avLst/>
+          </a:prstGeom>
+          <a:solidFill>
+            <a:srgbClr val="8EDBD4">
+              <a:alpha val="17999"/>
+            </a:srgbClr>
+          </a:solidFill>
+          <a:ln>
+            <a:solidFill>
+              <a:srgbClr val="8EDBD4">
+                <a:alpha val="17999"/>
+              </a:srgbClr>
+            </a:solidFill>
+          </a:ln>
+          <a:effectLst/>
+        </p:spPr>
+        <p:txBody>
+          <a:bodyPr rtlCol="0" anchor="ctr"/>
+          <a:lstStyle/>
+          <a:p>
+            <a:pPr algn="ctr"/>
+          </a:p>
+        </p:txBody>
+      </p:sp>
+      <p:sp>
+        <p:nvSpPr>
+          <p:cNvPr id="16" name="C2-E01 ellipse 14" descr="sci-ppt:o014"/>
+          <p:cNvSpPr/>
+          <p:nvPr/>
+        </p:nvSpPr>
+        <p:spPr>
+          <a:xfrm>
+            <a:off x="1600200" y="2514600"/>
+            <a:ext cx="1737360" cy="1737360"/>
+          </a:xfrm>
+          <a:prstGeom prst="ellipse">
+            <a:avLst/>
+          </a:prstGeom>
+          <a:solidFill>
+            <a:srgbClr val="8EDBD4">
+              <a:alpha val="22841"/>
+            </a:srgbClr>
+          </a:solidFill>
+          <a:ln>
+            <a:solidFill>
+              <a:srgbClr val="8EDBD4">
+                <a:alpha val="22841"/>
+              </a:srgbClr>
+            </a:solidFill>
+          </a:ln>
+          <a:effectLst/>
+        </p:spPr>
+        <p:txBody>
+          <a:bodyPr rtlCol="0" anchor="ctr"/>
+          <a:lstStyle/>
+          <a:p>
+            <a:pPr algn="ctr"/>
+          </a:p>
+        </p:txBody>
+      </p:sp>
+      <p:sp>
+        <p:nvSpPr>
+          <p:cNvPr id="17" name="C2-E01 ellipse 15" descr="sci-ppt:o015"/>
+          <p:cNvSpPr/>
+          <p:nvPr/>
+        </p:nvSpPr>
+        <p:spPr>
+          <a:xfrm>
+            <a:off x="1679170" y="2593570"/>
+            <a:ext cx="1579418" cy="1579418"/>
+          </a:xfrm>
+          <a:prstGeom prst="ellipse">
+            <a:avLst/>
+          </a:prstGeom>
+          <a:solidFill>
+            <a:srgbClr val="8EDBD4">
+              <a:alpha val="28392"/>
+            </a:srgbClr>
+          </a:solidFill>
+          <a:ln>
+            <a:solidFill>
+              <a:srgbClr val="8EDBD4">
+                <a:alpha val="28392"/>
+              </a:srgbClr>
+            </a:solidFill>
+          </a:ln>
+          <a:effectLst/>
+        </p:spPr>
+        <p:txBody>
+          <a:bodyPr rtlCol="0" anchor="ctr"/>
+          <a:lstStyle/>
+          <a:p>
+            <a:pPr algn="ctr"/>
+          </a:p>
+        </p:txBody>
+      </p:sp>
+      <p:sp>
+        <p:nvSpPr>
+          <p:cNvPr id="18" name="C2-E01 ellipse 16" descr="sci-ppt:o016"/>
+          <p:cNvSpPr/>
+          <p:nvPr/>
+        </p:nvSpPr>
+        <p:spPr>
+          <a:xfrm>
+            <a:off x="1758141" y="2672541"/>
+            <a:ext cx="1421476" cy="1421476"/>
+          </a:xfrm>
+          <a:prstGeom prst="ellipse">
+            <a:avLst/>
+          </a:prstGeom>
+          <a:solidFill>
+            <a:srgbClr val="8EDBD4">
+              <a:alpha val="34568"/>
+            </a:srgbClr>
+          </a:solidFill>
+          <a:ln>
+            <a:solidFill>
+              <a:srgbClr val="8EDBD4">
+                <a:alpha val="34568"/>
+              </a:srgbClr>
+            </a:solidFill>
+          </a:ln>
+          <a:effectLst/>
+        </p:spPr>
+        <p:txBody>
+          <a:bodyPr rtlCol="0" anchor="ctr"/>
+          <a:lstStyle/>
+          <a:p>
+            <a:pPr algn="ctr"/>
+          </a:p>
+        </p:txBody>
+      </p:sp>
+      <p:sp>
+        <p:nvSpPr>
+          <p:cNvPr id="19" name="C2-E01 ellipse 17" descr="sci-ppt:o017"/>
+          <p:cNvSpPr/>
+          <p:nvPr/>
+        </p:nvSpPr>
+        <p:spPr>
+          <a:xfrm>
+            <a:off x="1837112" y="2751512"/>
+            <a:ext cx="1263534" cy="1263534"/>
+          </a:xfrm>
+          <a:prstGeom prst="ellipse">
+            <a:avLst/>
+          </a:prstGeom>
+          <a:solidFill>
+            <a:srgbClr val="8EDBD4">
+              <a:alpha val="41225"/>
+            </a:srgbClr>
+          </a:solidFill>
+          <a:ln>
+            <a:solidFill>
+              <a:srgbClr val="8EDBD4">
+                <a:alpha val="41225"/>
+              </a:srgbClr>
+            </a:solidFill>
+          </a:ln>
+          <a:effectLst/>
+        </p:spPr>
+        <p:txBody>
+          <a:bodyPr rtlCol="0" anchor="ctr"/>
+          <a:lstStyle/>
+          <a:p>
+            <a:pPr algn="ctr"/>
+          </a:p>
+        </p:txBody>
+      </p:sp>
+      <p:sp>
+        <p:nvSpPr>
+          <p:cNvPr id="20" name="C2-E01 ellipse 18" descr="sci-ppt:o018"/>
+          <p:cNvSpPr/>
+          <p:nvPr/>
+        </p:nvSpPr>
+        <p:spPr>
+          <a:xfrm>
+            <a:off x="1916083" y="2830483"/>
+            <a:ext cx="1105592" cy="1105592"/>
+          </a:xfrm>
+          <a:prstGeom prst="ellipse">
+            <a:avLst/>
+          </a:prstGeom>
+          <a:solidFill>
+            <a:srgbClr val="8EDBD4">
+              <a:alpha val="48155"/>
+            </a:srgbClr>
+          </a:solidFill>
+          <a:ln>
+            <a:solidFill>
+              <a:srgbClr val="8EDBD4">
+                <a:alpha val="48155"/>
+              </a:srgbClr>
+            </a:solidFill>
+          </a:ln>
+          <a:effectLst/>
+        </p:spPr>
+        <p:txBody>
+          <a:bodyPr rtlCol="0" anchor="ctr"/>
+          <a:lstStyle/>
+          <a:p>
+            <a:pPr algn="ctr"/>
+          </a:p>
+        </p:txBody>
+      </p:sp>
+      <p:sp>
+        <p:nvSpPr>
+          <p:cNvPr id="21" name="C2-E01 ellipse 19" descr="sci-ppt:o019"/>
+          <p:cNvSpPr/>
+          <p:nvPr/>
+        </p:nvSpPr>
+        <p:spPr>
+          <a:xfrm>
+            <a:off x="1995054" y="2909454"/>
+            <a:ext cx="947650" cy="947650"/>
+          </a:xfrm>
+          <a:prstGeom prst="ellipse">
+            <a:avLst/>
+          </a:prstGeom>
+          <a:solidFill>
+            <a:srgbClr val="8EDBD4">
+              <a:alpha val="55097"/>
+            </a:srgbClr>
+          </a:solidFill>
+          <a:ln>
+            <a:solidFill>
+              <a:srgbClr val="8EDBD4">
+                <a:alpha val="55097"/>
+              </a:srgbClr>
+            </a:solidFill>
+          </a:ln>
+          <a:effectLst/>
+        </p:spPr>
+        <p:txBody>
+          <a:bodyPr rtlCol="0" anchor="ctr"/>
+          <a:lstStyle/>
+          <a:p>
+            <a:pPr algn="ctr"/>
+          </a:p>
+        </p:txBody>
+      </p:sp>
+      <p:sp>
+        <p:nvSpPr>
+          <p:cNvPr id="22" name="C2-E01 ellipse 20" descr="sci-ppt:o020"/>
+          <p:cNvSpPr/>
+          <p:nvPr/>
+        </p:nvSpPr>
+        <p:spPr>
+          <a:xfrm>
+            <a:off x="2074025" y="2988425"/>
+            <a:ext cx="789709" cy="789709"/>
+          </a:xfrm>
+          <a:prstGeom prst="ellipse">
+            <a:avLst/>
+          </a:prstGeom>
+          <a:solidFill>
+            <a:srgbClr val="8EDBD4">
+              <a:alpha val="61747"/>
+            </a:srgbClr>
+          </a:solidFill>
+          <a:ln>
+            <a:solidFill>
+              <a:srgbClr val="8EDBD4">
+                <a:alpha val="61747"/>
+              </a:srgbClr>
+            </a:solidFill>
+          </a:ln>
+          <a:effectLst/>
+        </p:spPr>
+        <p:txBody>
+          <a:bodyPr rtlCol="0" anchor="ctr"/>
+          <a:lstStyle/>
+          <a:p>
+            <a:pPr algn="ctr"/>
+          </a:p>
+        </p:txBody>
+      </p:sp>
+      <p:sp>
+        <p:nvSpPr>
+          <p:cNvPr id="23" name="C2-E01 ellipse 21" descr="sci-ppt:o021"/>
+          <p:cNvSpPr/>
+          <p:nvPr/>
+        </p:nvSpPr>
+        <p:spPr>
+          <a:xfrm>
+            <a:off x="2152996" y="3067396"/>
+            <a:ext cx="631767" cy="631767"/>
+          </a:xfrm>
+          <a:prstGeom prst="ellipse">
+            <a:avLst/>
+          </a:prstGeom>
+          <a:solidFill>
+            <a:srgbClr val="8EDBD4">
+              <a:alpha val="67781"/>
+            </a:srgbClr>
+          </a:solidFill>
+          <a:ln>
+            <a:solidFill>
+              <a:srgbClr val="8EDBD4">
+                <a:alpha val="67781"/>
+              </a:srgbClr>
+            </a:solidFill>
+          </a:ln>
+          <a:effectLst/>
+        </p:spPr>
+        <p:txBody>
+          <a:bodyPr rtlCol="0" anchor="ctr"/>
+          <a:lstStyle/>
+          <a:p>
+            <a:pPr algn="ctr"/>
+          </a:p>
+        </p:txBody>
+      </p:sp>
+      <p:sp>
+        <p:nvSpPr>
+          <p:cNvPr id="24" name="C2-E01 ellipse 22" descr="sci-ppt:o022"/>
+          <p:cNvSpPr/>
+          <p:nvPr/>
+        </p:nvSpPr>
+        <p:spPr>
+          <a:xfrm>
+            <a:off x="2231967" y="3146367"/>
+            <a:ext cx="473825" cy="473825"/>
+          </a:xfrm>
+          <a:prstGeom prst="ellipse">
+            <a:avLst/>
+          </a:prstGeom>
+          <a:solidFill>
+            <a:srgbClr val="8EDBD4">
+              <a:alpha val="72878"/>
+            </a:srgbClr>
+          </a:solidFill>
+          <a:ln>
+            <a:solidFill>
+              <a:srgbClr val="8EDBD4">
+                <a:alpha val="72878"/>
+              </a:srgbClr>
+            </a:solidFill>
+          </a:ln>
+          <a:effectLst/>
+        </p:spPr>
+        <p:txBody>
+          <a:bodyPr rtlCol="0" anchor="ctr"/>
+          <a:lstStyle/>
+          <a:p>
+            <a:pPr algn="ctr"/>
+          </a:p>
+        </p:txBody>
+      </p:sp>
+      <p:sp>
+        <p:nvSpPr>
+          <p:cNvPr id="25" name="C2-E01 ellipse 23" descr="sci-ppt:o023"/>
+          <p:cNvSpPr/>
+          <p:nvPr/>
+        </p:nvSpPr>
+        <p:spPr>
+          <a:xfrm>
+            <a:off x="2310938" y="3225338"/>
+            <a:ext cx="315883" cy="315883"/>
+          </a:xfrm>
+          <a:prstGeom prst="ellipse">
+            <a:avLst/>
+          </a:prstGeom>
+          <a:solidFill>
+            <a:srgbClr val="8EDBD4">
+              <a:alpha val="76753"/>
+            </a:srgbClr>
+          </a:solidFill>
+          <a:ln>
+            <a:solidFill>
+              <a:srgbClr val="8EDBD4">
+                <a:alpha val="76753"/>
+              </a:srgbClr>
+            </a:solidFill>
+          </a:ln>
+          <a:effectLst/>
+        </p:spPr>
+        <p:txBody>
+          <a:bodyPr rtlCol="0" anchor="ctr"/>
+          <a:lstStyle/>
+          <a:p>
+            <a:pPr algn="ctr"/>
+          </a:p>
+        </p:txBody>
+      </p:sp>
+      <p:sp>
+        <p:nvSpPr>
+          <p:cNvPr id="26" name="C2-E01 ellipse 24" descr="sci-ppt:o024"/>
+          <p:cNvSpPr/>
+          <p:nvPr/>
+        </p:nvSpPr>
+        <p:spPr>
+          <a:xfrm>
+            <a:off x="2389909" y="3304309"/>
+            <a:ext cx="157941" cy="157941"/>
+          </a:xfrm>
+          <a:prstGeom prst="ellipse">
+            <a:avLst/>
+          </a:prstGeom>
+          <a:solidFill>
+            <a:srgbClr val="8EDBD4">
+              <a:alpha val="79176"/>
+            </a:srgbClr>
+          </a:solidFill>
+          <a:ln>
+            <a:solidFill>
+              <a:srgbClr val="8EDBD4">
+                <a:alpha val="79176"/>
+              </a:srgbClr>
+            </a:solidFill>
+          </a:ln>
+          <a:effectLst/>
+        </p:spPr>
+        <p:txBody>
+          <a:bodyPr rtlCol="0" anchor="ctr"/>
+          <a:lstStyle/>
+          <a:p>
+            <a:pPr algn="ctr"/>
+          </a:p>
+        </p:txBody>
+      </p:sp>
+      <p:sp>
+        <p:nvSpPr>
+          <p:cNvPr id="27" name="C2-E01 ellipse 25" descr="sci-ppt:o025"/>
+          <p:cNvSpPr/>
+          <p:nvPr/>
+        </p:nvSpPr>
+        <p:spPr>
+          <a:xfrm>
+            <a:off x="1371600" y="2286000"/>
+            <a:ext cx="2194560" cy="2194560"/>
           </a:xfrm>
           <a:prstGeom prst="ellipse">
             <a:avLst/>
           </a:prstGeom>
           <a:noFill/>
-          <a:ln w="21590">
+          <a:ln w="27940">
+            <a:solidFill>
+              <a:srgbClr val="F2B880"/>
+            </a:solidFill>
+          </a:ln>
+          <a:effectLst/>
+        </p:spPr>
+        <p:txBody>
+          <a:bodyPr rtlCol="0" anchor="ctr"/>
+          <a:lstStyle/>
+          <a:p>
+            <a:pPr algn="ctr"/>
+          </a:p>
+        </p:txBody>
+      </p:sp>
+      <p:cxnSp>
+        <p:nvCxnSpPr>
+          <p:cNvPr id="28" name="C2-E01 line 26" descr="sci-ppt:o026"/>
+          <p:cNvCxnSpPr/>
+          <p:nvPr/>
+        </p:nvCxnSpPr>
+        <p:spPr>
+          <a:xfrm>
+            <a:off x="2468880" y="3383280"/>
+            <a:ext cx="1097280" cy="0"/>
+          </a:xfrm>
+          <a:prstGeom prst="line">
+            <a:avLst/>
+          </a:prstGeom>
+          <a:ln w="25400">
+            <a:solidFill>
+              <a:srgbClr val="F2B880"/>
+            </a:solidFill>
+          </a:ln>
+          <a:effectLst/>
+        </p:spPr>
+      </p:cxnSp>
+      <p:sp>
+        <p:nvSpPr>
+          <p:cNvPr id="29" name="C2-E01 text 27" descr="sci-ppt:o027"/>
+          <p:cNvSpPr txBox="1"/>
+          <p:nvPr/>
+        </p:nvSpPr>
+        <p:spPr>
+          <a:xfrm>
+            <a:off x="2743200" y="3401568"/>
+            <a:ext cx="731520" cy="278130"/>
+          </a:xfrm>
+          <a:prstGeom prst="rect">
+            <a:avLst/>
+          </a:prstGeom>
+          <a:noFill/>
+          <a:effectLst/>
+        </p:spPr>
+        <p:txBody>
+          <a:bodyPr wrap="none" lIns="18288" rIns="18288" tIns="18288" bIns="18288" anchor="t">
+            <a:spAutoFit/>
+          </a:bodyPr>
+          <a:lstStyle/>
+          <a:p>
+            <a:pPr algn="l">
+              <a:spcAft>
+                <a:spcPts val="0"/>
+              </a:spcAft>
+            </a:pPr>
+            <a:r>
+              <a:rPr sz="1500" b="1" i="0">
+                <a:solidFill>
+                  <a:srgbClr val="F2B880"/>
+                </a:solidFill>
+                <a:latin typeface="Arial"/>
+              </a:rPr>
+              <a:t>w</a:t>
+            </a:r>
+          </a:p>
+        </p:txBody>
+      </p:sp>
+      <p:sp>
+        <p:nvSpPr>
+          <p:cNvPr id="30" name="C2-E01 text 28" descr="sci-ppt:o028"/>
+          <p:cNvSpPr txBox="1"/>
+          <p:nvPr/>
+        </p:nvSpPr>
+        <p:spPr>
+          <a:xfrm>
+            <a:off x="502920" y="5257800"/>
+            <a:ext cx="3931920" cy="417576"/>
+          </a:xfrm>
+          <a:prstGeom prst="rect">
+            <a:avLst/>
+          </a:prstGeom>
+          <a:noFill/>
+          <a:effectLst/>
+        </p:spPr>
+        <p:txBody>
+          <a:bodyPr wrap="none" lIns="18288" rIns="18288" tIns="18288" bIns="18288" anchor="t">
+            <a:spAutoFit/>
+          </a:bodyPr>
+          <a:lstStyle/>
+          <a:p>
+            <a:pPr algn="l">
+              <a:spcAft>
+                <a:spcPts val="0"/>
+              </a:spcAft>
+            </a:pPr>
+            <a:r>
+              <a:rPr sz="1200" b="0" i="0">
+                <a:solidFill>
+                  <a:srgbClr val="E7F0F3"/>
+                </a:solidFill>
+                <a:latin typeface="Arial"/>
+              </a:rPr>
+              <a:t>Brightest on the axis, fading outward. The</a:t>
+            </a:r>
+          </a:p>
+          <a:p>
+            <a:pPr algn="l">
+              <a:spcAft>
+                <a:spcPts val="0"/>
+              </a:spcAft>
+            </a:pPr>
+            <a:r>
+              <a:rPr sz="1200" b="0" i="0">
+                <a:solidFill>
+                  <a:srgbClr val="E7F0F3"/>
+                </a:solidFill>
+                <a:latin typeface="Arial"/>
+              </a:rPr>
+              <a:t>quoted radius w is where F drops to e⁻² of F₀.</a:t>
+            </a:r>
+          </a:p>
+        </p:txBody>
+      </p:sp>
+      <p:cxnSp>
+        <p:nvCxnSpPr>
+          <p:cNvPr id="31" name="C2-E01 line 29" descr="sci-ppt:o029"/>
+          <p:cNvCxnSpPr/>
+          <p:nvPr/>
+        </p:nvCxnSpPr>
+        <p:spPr>
+          <a:xfrm>
+            <a:off x="5486400" y="5029200"/>
+            <a:ext cx="5852160" cy="0"/>
+          </a:xfrm>
+          <a:prstGeom prst="line">
+            <a:avLst/>
+          </a:prstGeom>
+          <a:ln w="19050">
             <a:solidFill>
               <a:srgbClr val="B4C7D2"/>
             </a:solidFill>
           </a:ln>
           <a:effectLst/>
         </p:spPr>
-        <p:txBody>
-          <a:bodyPr rtlCol="0" anchor="ctr"/>
-          <a:lstStyle/>
-          <a:p>
-            <a:pPr algn="ctr"/>
-          </a:p>
-        </p:txBody>
-      </p:sp>
-      <p:sp>
-        <p:nvSpPr>
-          <p:cNvPr id="4" name="ellipse3" descr="sci-ppt:C2-E01-003"/>
-          <p:cNvSpPr/>
+      </p:cxnSp>
+      <p:cxnSp>
+        <p:nvCxnSpPr>
+          <p:cNvPr id="32" name="C2-E01 line 30" descr="sci-ppt:o030"/>
+          <p:cNvCxnSpPr/>
           <p:nvPr/>
-        </p:nvSpPr>
-        <p:spPr>
-          <a:xfrm>
-            <a:off x="1914144" y="1853184"/>
-            <a:ext cx="1536192" cy="1536192"/>
-          </a:xfrm>
-          <a:prstGeom prst="ellipse">
+        </p:nvCxnSpPr>
+        <p:spPr>
+          <a:xfrm>
+            <a:off x="5486400" y="1371600"/>
+            <a:ext cx="0" cy="3657600"/>
+          </a:xfrm>
+          <a:prstGeom prst="line">
             <a:avLst/>
           </a:prstGeom>
-          <a:noFill/>
-          <a:ln w="21590">
+          <a:ln w="19050">
             <a:solidFill>
               <a:srgbClr val="B4C7D2"/>
             </a:solidFill>
           </a:ln>
           <a:effectLst/>
         </p:spPr>
-        <p:txBody>
-          <a:bodyPr rtlCol="0" anchor="ctr"/>
-          <a:lstStyle/>
-          <a:p>
-            <a:pPr algn="ctr"/>
-          </a:p>
-        </p:txBody>
-      </p:sp>
+      </p:cxnSp>
       <p:cxnSp>
         <p:nvCxnSpPr>
-          <p:cNvPr id="5" name="arrow4" descr="sci-ppt:C2-E01-004"/>
+          <p:cNvPr id="33" name="C2-E01 line 31" descr="sci-ppt:o031"/>
           <p:cNvCxnSpPr/>
           <p:nvPr/>
         </p:nvCxnSpPr>
         <p:spPr>
           <a:xfrm>
-            <a:off x="2682240" y="2621280"/>
-            <a:ext cx="1280159" cy="0"/>
+            <a:off x="5486400" y="5029200"/>
+            <a:ext cx="0" cy="64008"/>
           </a:xfrm>
           <a:prstGeom prst="line">
             <a:avLst/>
           </a:prstGeom>
-          <a:ln w="25400">
+          <a:ln w="12700">
             <a:solidFill>
-              <a:srgbClr val="8EDBD4"/>
+              <a:srgbClr val="B4C7D2"/>
             </a:solidFill>
-            <a:headEnd type="none" w="med" len="med"/>
-            <a:tailEnd type="triangle" w="med" len="med"/>
           </a:ln>
           <a:effectLst/>
         </p:spPr>
       </p:cxnSp>
-      <p:sp>
-        <p:nvSpPr>
-          <p:cNvPr id="6" name="text5" descr="sci-ppt:C2-E01-005"/>
+      <p:cxnSp>
+        <p:nvCxnSpPr>
+          <p:cNvPr id="34" name="C2-E01 line 32" descr="sci-ppt:o032"/>
+          <p:cNvCxnSpPr/>
+          <p:nvPr/>
+        </p:nvCxnSpPr>
+        <p:spPr>
+          <a:xfrm>
+            <a:off x="5486400" y="1371600"/>
+            <a:ext cx="0" cy="3657600"/>
+          </a:xfrm>
+          <a:prstGeom prst="line">
+            <a:avLst/>
+          </a:prstGeom>
+          <a:ln w="7620">
+            <a:solidFill>
+              <a:srgbClr val="2E4756"/>
+            </a:solidFill>
+          </a:ln>
+          <a:effectLst/>
+        </p:spPr>
+      </p:cxnSp>
+      <p:sp>
+        <p:nvSpPr>
+          <p:cNvPr id="35" name="C2-E01 text 33" descr="sci-ppt:o033"/>
           <p:cNvSpPr txBox="1"/>
           <p:nvPr/>
         </p:nvSpPr>
         <p:spPr>
           <a:xfrm>
-            <a:off x="2926080" y="2743200"/>
-            <a:ext cx="975360" cy="377952"/>
+            <a:off x="5029200" y="5111496"/>
+            <a:ext cx="914400" cy="208407"/>
           </a:xfrm>
           <a:prstGeom prst="rect">
             <a:avLst/>
@@ -3238,38 +4254,82 @@
           <a:effectLst/>
         </p:spPr>
         <p:txBody>
-          <a:bodyPr wrap="none" lIns="27432" rIns="27432" tIns="18288" bIns="18288" anchor="ctr">
+          <a:bodyPr wrap="none" lIns="18288" rIns="18288" tIns="18288" bIns="18288" anchor="t">
             <a:spAutoFit/>
           </a:bodyPr>
           <a:lstStyle/>
           <a:p>
-            <a:pPr algn="l">
+            <a:pPr algn="ctr">
               <a:spcAft>
                 <a:spcPts val="0"/>
               </a:spcAft>
             </a:pPr>
             <a:r>
-              <a:rPr sz="1920" b="0" i="0">
+              <a:rPr sz="1050" b="0" i="0">
                 <a:solidFill>
-                  <a:srgbClr val="E7F0F3"/>
+                  <a:srgbClr val="B4C7D2"/>
                 </a:solidFill>
                 <a:latin typeface="Arial"/>
               </a:rPr>
-              <a:t>w</a:t>
-            </a:r>
-          </a:p>
-        </p:txBody>
-      </p:sp>
-      <p:sp>
-        <p:nvSpPr>
-          <p:cNvPr id="7" name="text6" descr="sci-ppt:C2-E01-006"/>
+              <a:t>0.0</a:t>
+            </a:r>
+          </a:p>
+        </p:txBody>
+      </p:sp>
+      <p:cxnSp>
+        <p:nvCxnSpPr>
+          <p:cNvPr id="36" name="C2-E01 line 34" descr="sci-ppt:o034"/>
+          <p:cNvCxnSpPr/>
+          <p:nvPr/>
+        </p:nvCxnSpPr>
+        <p:spPr>
+          <a:xfrm>
+            <a:off x="6816436" y="5029200"/>
+            <a:ext cx="0" cy="64008"/>
+          </a:xfrm>
+          <a:prstGeom prst="line">
+            <a:avLst/>
+          </a:prstGeom>
+          <a:ln w="12700">
+            <a:solidFill>
+              <a:srgbClr val="B4C7D2"/>
+            </a:solidFill>
+          </a:ln>
+          <a:effectLst/>
+        </p:spPr>
+      </p:cxnSp>
+      <p:cxnSp>
+        <p:nvCxnSpPr>
+          <p:cNvPr id="37" name="C2-E01 line 35" descr="sci-ppt:o035"/>
+          <p:cNvCxnSpPr/>
+          <p:nvPr/>
+        </p:nvCxnSpPr>
+        <p:spPr>
+          <a:xfrm>
+            <a:off x="6816436" y="1371600"/>
+            <a:ext cx="0" cy="3657600"/>
+          </a:xfrm>
+          <a:prstGeom prst="line">
+            <a:avLst/>
+          </a:prstGeom>
+          <a:ln w="7620">
+            <a:solidFill>
+              <a:srgbClr val="2E4756"/>
+            </a:solidFill>
+          </a:ln>
+          <a:effectLst/>
+        </p:spPr>
+      </p:cxnSp>
+      <p:sp>
+        <p:nvSpPr>
+          <p:cNvPr id="38" name="C2-E01 text 36" descr="sci-ppt:o036"/>
           <p:cNvSpPr txBox="1"/>
           <p:nvPr/>
         </p:nvSpPr>
         <p:spPr>
           <a:xfrm>
-            <a:off x="1402080" y="4084320"/>
-            <a:ext cx="4876800" cy="340156"/>
+            <a:off x="6359236" y="5111496"/>
+            <a:ext cx="914400" cy="208407"/>
           </a:xfrm>
           <a:prstGeom prst="rect">
             <a:avLst/>
@@ -3278,86 +4338,82 @@
           <a:effectLst/>
         </p:spPr>
         <p:txBody>
-          <a:bodyPr wrap="none" lIns="27432" rIns="27432" tIns="18288" bIns="18288" anchor="ctr">
+          <a:bodyPr wrap="none" lIns="18288" rIns="18288" tIns="18288" bIns="18288" anchor="t">
             <a:spAutoFit/>
           </a:bodyPr>
           <a:lstStyle/>
           <a:p>
-            <a:pPr algn="l">
+            <a:pPr algn="ctr">
               <a:spcAft>
                 <a:spcPts val="0"/>
               </a:spcAft>
             </a:pPr>
             <a:r>
-              <a:rPr sz="1728" b="0" i="0">
+              <a:rPr sz="1050" b="0" i="0">
                 <a:solidFill>
-                  <a:srgbClr val="E7F0F3"/>
+                  <a:srgbClr val="B4C7D2"/>
                 </a:solidFill>
                 <a:latin typeface="Arial"/>
               </a:rPr>
-              <a:t>Illuminated transverse plane</a:t>
+              <a:t>0.5</a:t>
             </a:r>
           </a:p>
         </p:txBody>
       </p:sp>
       <p:cxnSp>
         <p:nvCxnSpPr>
-          <p:cNvPr id="8" name="arrow7" descr="sci-ppt:C2-E01-007"/>
+          <p:cNvPr id="39" name="C2-E01 line 37" descr="sci-ppt:o037"/>
           <p:cNvCxnSpPr/>
           <p:nvPr/>
         </p:nvCxnSpPr>
         <p:spPr>
           <a:xfrm>
-            <a:off x="6583680" y="3962399"/>
-            <a:ext cx="4267200" cy="0"/>
+            <a:off x="8146472" y="5029200"/>
+            <a:ext cx="0" cy="64008"/>
           </a:xfrm>
           <a:prstGeom prst="line">
             <a:avLst/>
           </a:prstGeom>
-          <a:ln w="25400">
+          <a:ln w="12700">
             <a:solidFill>
-              <a:srgbClr val="8EDBD4"/>
+              <a:srgbClr val="B4C7D2"/>
             </a:solidFill>
-            <a:headEnd type="none" w="med" len="med"/>
-            <a:tailEnd type="triangle" w="med" len="med"/>
           </a:ln>
           <a:effectLst/>
         </p:spPr>
       </p:cxnSp>
       <p:cxnSp>
         <p:nvCxnSpPr>
-          <p:cNvPr id="9" name="arrow8" descr="sci-ppt:C2-E01-008"/>
+          <p:cNvPr id="40" name="C2-E01 line 38" descr="sci-ppt:o038"/>
           <p:cNvCxnSpPr/>
           <p:nvPr/>
         </p:nvCxnSpPr>
         <p:spPr>
-          <a:xfrm flipV="1">
-            <a:off x="6583680" y="1402080"/>
-            <a:ext cx="0" cy="2560319"/>
+          <a:xfrm>
+            <a:off x="8146472" y="1371600"/>
+            <a:ext cx="0" cy="3657600"/>
           </a:xfrm>
           <a:prstGeom prst="line">
             <a:avLst/>
           </a:prstGeom>
-          <a:ln w="25400">
+          <a:ln w="7620">
             <a:solidFill>
-              <a:srgbClr val="8EDBD4"/>
+              <a:srgbClr val="2E4756"/>
             </a:solidFill>
-            <a:headEnd type="none" w="med" len="med"/>
-            <a:tailEnd type="triangle" w="med" len="med"/>
           </a:ln>
           <a:effectLst/>
         </p:spPr>
       </p:cxnSp>
       <p:sp>
         <p:nvSpPr>
-          <p:cNvPr id="10" name="text9" descr="sci-ppt:C2-E01-009"/>
+          <p:cNvPr id="41" name="C2-E01 text 39" descr="sci-ppt:o039"/>
           <p:cNvSpPr txBox="1"/>
           <p:nvPr/>
         </p:nvSpPr>
         <p:spPr>
           <a:xfrm>
-            <a:off x="9875520" y="4084320"/>
-            <a:ext cx="1828800" cy="321259"/>
+            <a:off x="7689272" y="5111496"/>
+            <a:ext cx="914400" cy="208407"/>
           </a:xfrm>
           <a:prstGeom prst="rect">
             <a:avLst/>
@@ -3366,18 +4422,584 @@
           <a:effectLst/>
         </p:spPr>
         <p:txBody>
-          <a:bodyPr wrap="none" lIns="27432" rIns="27432" tIns="18288" bIns="18288" anchor="ctr">
+          <a:bodyPr wrap="none" lIns="18288" rIns="18288" tIns="18288" bIns="18288" anchor="t">
             <a:spAutoFit/>
           </a:bodyPr>
           <a:lstStyle/>
           <a:p>
-            <a:pPr algn="l">
+            <a:pPr algn="ctr">
               <a:spcAft>
                 <a:spcPts val="0"/>
               </a:spcAft>
             </a:pPr>
             <a:r>
-              <a:rPr sz="1632" b="0" i="0">
+              <a:rPr sz="1050" b="0" i="0">
+                <a:solidFill>
+                  <a:srgbClr val="B4C7D2"/>
+                </a:solidFill>
+                <a:latin typeface="Arial"/>
+              </a:rPr>
+              <a:t>1.0</a:t>
+            </a:r>
+          </a:p>
+        </p:txBody>
+      </p:sp>
+      <p:cxnSp>
+        <p:nvCxnSpPr>
+          <p:cNvPr id="42" name="C2-E01 line 40" descr="sci-ppt:o040"/>
+          <p:cNvCxnSpPr/>
+          <p:nvPr/>
+        </p:nvCxnSpPr>
+        <p:spPr>
+          <a:xfrm>
+            <a:off x="9476509" y="5029200"/>
+            <a:ext cx="0" cy="64008"/>
+          </a:xfrm>
+          <a:prstGeom prst="line">
+            <a:avLst/>
+          </a:prstGeom>
+          <a:ln w="12700">
+            <a:solidFill>
+              <a:srgbClr val="B4C7D2"/>
+            </a:solidFill>
+          </a:ln>
+          <a:effectLst/>
+        </p:spPr>
+      </p:cxnSp>
+      <p:cxnSp>
+        <p:nvCxnSpPr>
+          <p:cNvPr id="43" name="C2-E01 line 41" descr="sci-ppt:o041"/>
+          <p:cNvCxnSpPr/>
+          <p:nvPr/>
+        </p:nvCxnSpPr>
+        <p:spPr>
+          <a:xfrm>
+            <a:off x="9476509" y="1371600"/>
+            <a:ext cx="0" cy="3657600"/>
+          </a:xfrm>
+          <a:prstGeom prst="line">
+            <a:avLst/>
+          </a:prstGeom>
+          <a:ln w="7620">
+            <a:solidFill>
+              <a:srgbClr val="2E4756"/>
+            </a:solidFill>
+          </a:ln>
+          <a:effectLst/>
+        </p:spPr>
+      </p:cxnSp>
+      <p:sp>
+        <p:nvSpPr>
+          <p:cNvPr id="44" name="C2-E01 text 42" descr="sci-ppt:o042"/>
+          <p:cNvSpPr txBox="1"/>
+          <p:nvPr/>
+        </p:nvSpPr>
+        <p:spPr>
+          <a:xfrm>
+            <a:off x="9019309" y="5111496"/>
+            <a:ext cx="914400" cy="208407"/>
+          </a:xfrm>
+          <a:prstGeom prst="rect">
+            <a:avLst/>
+          </a:prstGeom>
+          <a:noFill/>
+          <a:effectLst/>
+        </p:spPr>
+        <p:txBody>
+          <a:bodyPr wrap="none" lIns="18288" rIns="18288" tIns="18288" bIns="18288" anchor="t">
+            <a:spAutoFit/>
+          </a:bodyPr>
+          <a:lstStyle/>
+          <a:p>
+            <a:pPr algn="ctr">
+              <a:spcAft>
+                <a:spcPts val="0"/>
+              </a:spcAft>
+            </a:pPr>
+            <a:r>
+              <a:rPr sz="1050" b="0" i="0">
+                <a:solidFill>
+                  <a:srgbClr val="B4C7D2"/>
+                </a:solidFill>
+                <a:latin typeface="Arial"/>
+              </a:rPr>
+              <a:t>1.5</a:t>
+            </a:r>
+          </a:p>
+        </p:txBody>
+      </p:sp>
+      <p:cxnSp>
+        <p:nvCxnSpPr>
+          <p:cNvPr id="45" name="C2-E01 line 43" descr="sci-ppt:o043"/>
+          <p:cNvCxnSpPr/>
+          <p:nvPr/>
+        </p:nvCxnSpPr>
+        <p:spPr>
+          <a:xfrm>
+            <a:off x="10806545" y="5029200"/>
+            <a:ext cx="0" cy="64008"/>
+          </a:xfrm>
+          <a:prstGeom prst="line">
+            <a:avLst/>
+          </a:prstGeom>
+          <a:ln w="12700">
+            <a:solidFill>
+              <a:srgbClr val="B4C7D2"/>
+            </a:solidFill>
+          </a:ln>
+          <a:effectLst/>
+        </p:spPr>
+      </p:cxnSp>
+      <p:cxnSp>
+        <p:nvCxnSpPr>
+          <p:cNvPr id="46" name="C2-E01 line 44" descr="sci-ppt:o044"/>
+          <p:cNvCxnSpPr/>
+          <p:nvPr/>
+        </p:nvCxnSpPr>
+        <p:spPr>
+          <a:xfrm>
+            <a:off x="10806545" y="1371600"/>
+            <a:ext cx="0" cy="3657600"/>
+          </a:xfrm>
+          <a:prstGeom prst="line">
+            <a:avLst/>
+          </a:prstGeom>
+          <a:ln w="7620">
+            <a:solidFill>
+              <a:srgbClr val="2E4756"/>
+            </a:solidFill>
+          </a:ln>
+          <a:effectLst/>
+        </p:spPr>
+      </p:cxnSp>
+      <p:sp>
+        <p:nvSpPr>
+          <p:cNvPr id="47" name="C2-E01 text 45" descr="sci-ppt:o045"/>
+          <p:cNvSpPr txBox="1"/>
+          <p:nvPr/>
+        </p:nvSpPr>
+        <p:spPr>
+          <a:xfrm>
+            <a:off x="10349345" y="5111496"/>
+            <a:ext cx="914400" cy="208407"/>
+          </a:xfrm>
+          <a:prstGeom prst="rect">
+            <a:avLst/>
+          </a:prstGeom>
+          <a:noFill/>
+          <a:effectLst/>
+        </p:spPr>
+        <p:txBody>
+          <a:bodyPr wrap="none" lIns="18288" rIns="18288" tIns="18288" bIns="18288" anchor="t">
+            <a:spAutoFit/>
+          </a:bodyPr>
+          <a:lstStyle/>
+          <a:p>
+            <a:pPr algn="ctr">
+              <a:spcAft>
+                <a:spcPts val="0"/>
+              </a:spcAft>
+            </a:pPr>
+            <a:r>
+              <a:rPr sz="1050" b="0" i="0">
+                <a:solidFill>
+                  <a:srgbClr val="B4C7D2"/>
+                </a:solidFill>
+                <a:latin typeface="Arial"/>
+              </a:rPr>
+              <a:t>2.0</a:t>
+            </a:r>
+          </a:p>
+        </p:txBody>
+      </p:sp>
+      <p:cxnSp>
+        <p:nvCxnSpPr>
+          <p:cNvPr id="48" name="C2-E01 line 46" descr="sci-ppt:o046"/>
+          <p:cNvCxnSpPr/>
+          <p:nvPr/>
+        </p:nvCxnSpPr>
+        <p:spPr>
+          <a:xfrm>
+            <a:off x="5422392" y="5029200"/>
+            <a:ext cx="64008" cy="0"/>
+          </a:xfrm>
+          <a:prstGeom prst="line">
+            <a:avLst/>
+          </a:prstGeom>
+          <a:ln w="12700">
+            <a:solidFill>
+              <a:srgbClr val="B4C7D2"/>
+            </a:solidFill>
+          </a:ln>
+          <a:effectLst/>
+        </p:spPr>
+      </p:cxnSp>
+      <p:cxnSp>
+        <p:nvCxnSpPr>
+          <p:cNvPr id="49" name="C2-E01 line 47" descr="sci-ppt:o047"/>
+          <p:cNvCxnSpPr/>
+          <p:nvPr/>
+        </p:nvCxnSpPr>
+        <p:spPr>
+          <a:xfrm>
+            <a:off x="5422392" y="4197927"/>
+            <a:ext cx="64008" cy="0"/>
+          </a:xfrm>
+          <a:prstGeom prst="line">
+            <a:avLst/>
+          </a:prstGeom>
+          <a:ln w="12700">
+            <a:solidFill>
+              <a:srgbClr val="B4C7D2"/>
+            </a:solidFill>
+          </a:ln>
+          <a:effectLst/>
+        </p:spPr>
+      </p:cxnSp>
+      <p:cxnSp>
+        <p:nvCxnSpPr>
+          <p:cNvPr id="50" name="C2-E01 line 48" descr="sci-ppt:o048"/>
+          <p:cNvCxnSpPr/>
+          <p:nvPr/>
+        </p:nvCxnSpPr>
+        <p:spPr>
+          <a:xfrm>
+            <a:off x="5486400" y="4197927"/>
+            <a:ext cx="5852160" cy="0"/>
+          </a:xfrm>
+          <a:prstGeom prst="line">
+            <a:avLst/>
+          </a:prstGeom>
+          <a:ln w="7620">
+            <a:solidFill>
+              <a:srgbClr val="2E4756"/>
+            </a:solidFill>
+          </a:ln>
+          <a:effectLst/>
+        </p:spPr>
+      </p:cxnSp>
+      <p:sp>
+        <p:nvSpPr>
+          <p:cNvPr id="51" name="C2-E01 text 49" descr="sci-ppt:o049"/>
+          <p:cNvSpPr txBox="1"/>
+          <p:nvPr/>
+        </p:nvSpPr>
+        <p:spPr>
+          <a:xfrm>
+            <a:off x="4617720" y="4115631"/>
+            <a:ext cx="777240" cy="208407"/>
+          </a:xfrm>
+          <a:prstGeom prst="rect">
+            <a:avLst/>
+          </a:prstGeom>
+          <a:noFill/>
+          <a:effectLst/>
+        </p:spPr>
+        <p:txBody>
+          <a:bodyPr wrap="none" lIns="18288" rIns="18288" tIns="18288" bIns="18288" anchor="t">
+            <a:spAutoFit/>
+          </a:bodyPr>
+          <a:lstStyle/>
+          <a:p>
+            <a:pPr algn="r">
+              <a:spcAft>
+                <a:spcPts val="0"/>
+              </a:spcAft>
+            </a:pPr>
+            <a:r>
+              <a:rPr sz="1050" b="0" i="0">
+                <a:solidFill>
+                  <a:srgbClr val="B4C7D2"/>
+                </a:solidFill>
+                <a:latin typeface="Arial"/>
+              </a:rPr>
+              <a:t>0.25</a:t>
+            </a:r>
+          </a:p>
+        </p:txBody>
+      </p:sp>
+      <p:cxnSp>
+        <p:nvCxnSpPr>
+          <p:cNvPr id="52" name="C2-E01 line 50" descr="sci-ppt:o050"/>
+          <p:cNvCxnSpPr/>
+          <p:nvPr/>
+        </p:nvCxnSpPr>
+        <p:spPr>
+          <a:xfrm>
+            <a:off x="5422392" y="3366654"/>
+            <a:ext cx="64008" cy="0"/>
+          </a:xfrm>
+          <a:prstGeom prst="line">
+            <a:avLst/>
+          </a:prstGeom>
+          <a:ln w="12700">
+            <a:solidFill>
+              <a:srgbClr val="B4C7D2"/>
+            </a:solidFill>
+          </a:ln>
+          <a:effectLst/>
+        </p:spPr>
+      </p:cxnSp>
+      <p:cxnSp>
+        <p:nvCxnSpPr>
+          <p:cNvPr id="53" name="C2-E01 line 51" descr="sci-ppt:o051"/>
+          <p:cNvCxnSpPr/>
+          <p:nvPr/>
+        </p:nvCxnSpPr>
+        <p:spPr>
+          <a:xfrm>
+            <a:off x="5486400" y="3366654"/>
+            <a:ext cx="5852160" cy="0"/>
+          </a:xfrm>
+          <a:prstGeom prst="line">
+            <a:avLst/>
+          </a:prstGeom>
+          <a:ln w="7620">
+            <a:solidFill>
+              <a:srgbClr val="2E4756"/>
+            </a:solidFill>
+          </a:ln>
+          <a:effectLst/>
+        </p:spPr>
+      </p:cxnSp>
+      <p:sp>
+        <p:nvSpPr>
+          <p:cNvPr id="54" name="C2-E01 text 52" descr="sci-ppt:o052"/>
+          <p:cNvSpPr txBox="1"/>
+          <p:nvPr/>
+        </p:nvSpPr>
+        <p:spPr>
+          <a:xfrm>
+            <a:off x="4617720" y="3284358"/>
+            <a:ext cx="777240" cy="208407"/>
+          </a:xfrm>
+          <a:prstGeom prst="rect">
+            <a:avLst/>
+          </a:prstGeom>
+          <a:noFill/>
+          <a:effectLst/>
+        </p:spPr>
+        <p:txBody>
+          <a:bodyPr wrap="none" lIns="18288" rIns="18288" tIns="18288" bIns="18288" anchor="t">
+            <a:spAutoFit/>
+          </a:bodyPr>
+          <a:lstStyle/>
+          <a:p>
+            <a:pPr algn="r">
+              <a:spcAft>
+                <a:spcPts val="0"/>
+              </a:spcAft>
+            </a:pPr>
+            <a:r>
+              <a:rPr sz="1050" b="0" i="0">
+                <a:solidFill>
+                  <a:srgbClr val="B4C7D2"/>
+                </a:solidFill>
+                <a:latin typeface="Arial"/>
+              </a:rPr>
+              <a:t>0.50</a:t>
+            </a:r>
+          </a:p>
+        </p:txBody>
+      </p:sp>
+      <p:cxnSp>
+        <p:nvCxnSpPr>
+          <p:cNvPr id="55" name="C2-E01 line 53" descr="sci-ppt:o053"/>
+          <p:cNvCxnSpPr/>
+          <p:nvPr/>
+        </p:nvCxnSpPr>
+        <p:spPr>
+          <a:xfrm>
+            <a:off x="5422392" y="2535381"/>
+            <a:ext cx="64008" cy="0"/>
+          </a:xfrm>
+          <a:prstGeom prst="line">
+            <a:avLst/>
+          </a:prstGeom>
+          <a:ln w="12700">
+            <a:solidFill>
+              <a:srgbClr val="B4C7D2"/>
+            </a:solidFill>
+          </a:ln>
+          <a:effectLst/>
+        </p:spPr>
+      </p:cxnSp>
+      <p:cxnSp>
+        <p:nvCxnSpPr>
+          <p:cNvPr id="56" name="C2-E01 line 54" descr="sci-ppt:o054"/>
+          <p:cNvCxnSpPr/>
+          <p:nvPr/>
+        </p:nvCxnSpPr>
+        <p:spPr>
+          <a:xfrm>
+            <a:off x="5486400" y="2535381"/>
+            <a:ext cx="5852160" cy="0"/>
+          </a:xfrm>
+          <a:prstGeom prst="line">
+            <a:avLst/>
+          </a:prstGeom>
+          <a:ln w="7620">
+            <a:solidFill>
+              <a:srgbClr val="2E4756"/>
+            </a:solidFill>
+          </a:ln>
+          <a:effectLst/>
+        </p:spPr>
+      </p:cxnSp>
+      <p:sp>
+        <p:nvSpPr>
+          <p:cNvPr id="57" name="C2-E01 text 55" descr="sci-ppt:o055"/>
+          <p:cNvSpPr txBox="1"/>
+          <p:nvPr/>
+        </p:nvSpPr>
+        <p:spPr>
+          <a:xfrm>
+            <a:off x="4617720" y="2453085"/>
+            <a:ext cx="777240" cy="208407"/>
+          </a:xfrm>
+          <a:prstGeom prst="rect">
+            <a:avLst/>
+          </a:prstGeom>
+          <a:noFill/>
+          <a:effectLst/>
+        </p:spPr>
+        <p:txBody>
+          <a:bodyPr wrap="none" lIns="18288" rIns="18288" tIns="18288" bIns="18288" anchor="t">
+            <a:spAutoFit/>
+          </a:bodyPr>
+          <a:lstStyle/>
+          <a:p>
+            <a:pPr algn="r">
+              <a:spcAft>
+                <a:spcPts val="0"/>
+              </a:spcAft>
+            </a:pPr>
+            <a:r>
+              <a:rPr sz="1050" b="0" i="0">
+                <a:solidFill>
+                  <a:srgbClr val="B4C7D2"/>
+                </a:solidFill>
+                <a:latin typeface="Arial"/>
+              </a:rPr>
+              <a:t>0.75</a:t>
+            </a:r>
+          </a:p>
+        </p:txBody>
+      </p:sp>
+      <p:cxnSp>
+        <p:nvCxnSpPr>
+          <p:cNvPr id="58" name="C2-E01 line 56" descr="sci-ppt:o056"/>
+          <p:cNvCxnSpPr/>
+          <p:nvPr/>
+        </p:nvCxnSpPr>
+        <p:spPr>
+          <a:xfrm>
+            <a:off x="5422392" y="1704109"/>
+            <a:ext cx="64008" cy="0"/>
+          </a:xfrm>
+          <a:prstGeom prst="line">
+            <a:avLst/>
+          </a:prstGeom>
+          <a:ln w="12700">
+            <a:solidFill>
+              <a:srgbClr val="B4C7D2"/>
+            </a:solidFill>
+          </a:ln>
+          <a:effectLst/>
+        </p:spPr>
+      </p:cxnSp>
+      <p:cxnSp>
+        <p:nvCxnSpPr>
+          <p:cNvPr id="59" name="C2-E01 line 57" descr="sci-ppt:o057"/>
+          <p:cNvCxnSpPr/>
+          <p:nvPr/>
+        </p:nvCxnSpPr>
+        <p:spPr>
+          <a:xfrm>
+            <a:off x="5486400" y="1704109"/>
+            <a:ext cx="5852160" cy="0"/>
+          </a:xfrm>
+          <a:prstGeom prst="line">
+            <a:avLst/>
+          </a:prstGeom>
+          <a:ln w="7620">
+            <a:solidFill>
+              <a:srgbClr val="2E4756"/>
+            </a:solidFill>
+          </a:ln>
+          <a:effectLst/>
+        </p:spPr>
+      </p:cxnSp>
+      <p:sp>
+        <p:nvSpPr>
+          <p:cNvPr id="60" name="C2-E01 text 58" descr="sci-ppt:o058"/>
+          <p:cNvSpPr txBox="1"/>
+          <p:nvPr/>
+        </p:nvSpPr>
+        <p:spPr>
+          <a:xfrm>
+            <a:off x="4617720" y="1621813"/>
+            <a:ext cx="777240" cy="208407"/>
+          </a:xfrm>
+          <a:prstGeom prst="rect">
+            <a:avLst/>
+          </a:prstGeom>
+          <a:noFill/>
+          <a:effectLst/>
+        </p:spPr>
+        <p:txBody>
+          <a:bodyPr wrap="none" lIns="18288" rIns="18288" tIns="18288" bIns="18288" anchor="t">
+            <a:spAutoFit/>
+          </a:bodyPr>
+          <a:lstStyle/>
+          <a:p>
+            <a:pPr algn="r">
+              <a:spcAft>
+                <a:spcPts val="0"/>
+              </a:spcAft>
+            </a:pPr>
+            <a:r>
+              <a:rPr sz="1050" b="0" i="0">
+                <a:solidFill>
+                  <a:srgbClr val="B4C7D2"/>
+                </a:solidFill>
+                <a:latin typeface="Arial"/>
+              </a:rPr>
+              <a:t>1.00</a:t>
+            </a:r>
+          </a:p>
+        </p:txBody>
+      </p:sp>
+      <p:sp>
+        <p:nvSpPr>
+          <p:cNvPr id="61" name="C2-E01 text 59" descr="sci-ppt:o059"/>
+          <p:cNvSpPr txBox="1"/>
+          <p:nvPr/>
+        </p:nvSpPr>
+        <p:spPr>
+          <a:xfrm>
+            <a:off x="5486400" y="5312664"/>
+            <a:ext cx="5852160" cy="231648"/>
+          </a:xfrm>
+          <a:prstGeom prst="rect">
+            <a:avLst/>
+          </a:prstGeom>
+          <a:noFill/>
+          <a:effectLst/>
+        </p:spPr>
+        <p:txBody>
+          <a:bodyPr wrap="none" lIns="18288" rIns="18288" tIns="18288" bIns="18288" anchor="t">
+            <a:spAutoFit/>
+          </a:bodyPr>
+          <a:lstStyle/>
+          <a:p>
+            <a:pPr algn="ctr">
+              <a:spcAft>
+                <a:spcPts val="0"/>
+              </a:spcAft>
+            </a:pPr>
+            <a:r>
+              <a:rPr sz="1200" b="0" i="0">
                 <a:solidFill>
                   <a:srgbClr val="E7F0F3"/>
                 </a:solidFill>
@@ -3390,14 +5012,14 @@
       </p:sp>
       <p:sp>
         <p:nvSpPr>
-          <p:cNvPr id="11" name="text10" descr="sci-ppt:C2-E01-010"/>
+          <p:cNvPr id="62" name="C2-E01 text 60" descr="sci-ppt:o060"/>
           <p:cNvSpPr txBox="1"/>
           <p:nvPr/>
         </p:nvSpPr>
         <p:spPr>
           <a:xfrm>
-            <a:off x="6461760" y="1036320"/>
-            <a:ext cx="3657600" cy="321259"/>
+            <a:off x="4937760" y="1024128"/>
+            <a:ext cx="5852160" cy="231648"/>
           </a:xfrm>
           <a:prstGeom prst="rect">
             <a:avLst/>
@@ -3406,7 +5028,7 @@
           <a:effectLst/>
         </p:spPr>
         <p:txBody>
-          <a:bodyPr wrap="none" lIns="27432" rIns="27432" tIns="18288" bIns="18288" anchor="ctr">
+          <a:bodyPr wrap="none" lIns="18288" rIns="18288" tIns="18288" bIns="18288" anchor="t">
             <a:spAutoFit/>
           </a:bodyPr>
           <a:lstStyle/>
@@ -3417,907 +5039,1965 @@
               </a:spcAft>
             </a:pPr>
             <a:r>
-              <a:rPr sz="1632" b="0" i="0">
+              <a:rPr sz="1200" b="0" i="0">
                 <a:solidFill>
                   <a:srgbClr val="E7F0F3"/>
                 </a:solidFill>
                 <a:latin typeface="Arial"/>
               </a:rPr>
-              <a:t>F / F0</a:t>
-            </a:r>
-          </a:p>
-        </p:txBody>
-      </p:sp>
-      <p:cxnSp>
-        <p:nvCxnSpPr>
-          <p:cNvPr id="12" name="line11" descr="sci-ppt:C2-E01-011"/>
-          <p:cNvCxnSpPr/>
+              <a:t>F(r) / F₀</a:t>
+            </a:r>
+          </a:p>
+        </p:txBody>
+      </p:sp>
+      <p:sp>
+        <p:nvSpPr>
+          <p:cNvPr id="63" name="C2-E01 polygon 61" descr="sci-ppt:o061"/>
+          <p:cNvSpPr/>
           <p:nvPr/>
-        </p:nvCxnSpPr>
-        <p:spPr>
-          <a:xfrm>
-            <a:off x="6644640" y="1524000"/>
-            <a:ext cx="103632" cy="12161"/>
-          </a:xfrm>
-          <a:prstGeom prst="line">
+        </p:nvSpPr>
+        <p:spPr>
+          <a:xfrm>
+            <a:off x="5486400" y="1704109"/>
+            <a:ext cx="5852160" cy="3324883"/>
+          </a:xfrm>
+          <a:custGeom>
             <a:avLst/>
-          </a:prstGeom>
-          <a:ln w="25400">
+            <a:gdLst/>
+            <a:ahLst/>
+            <a:cxnLst/>
+            <a:rect l="l" t="t" r="r" b="b"/>
+            <a:pathLst>
+              <a:path w="5852160" h="3324883">
+                <a:moveTo>
+                  <a:pt x="0" y="0"/>
+                </a:moveTo>
+                <a:lnTo>
+                  <a:pt x="29407" y="812"/>
+                </a:lnTo>
+                <a:lnTo>
+                  <a:pt x="58815" y="3249"/>
+                </a:lnTo>
+                <a:lnTo>
+                  <a:pt x="88223" y="7307"/>
+                </a:lnTo>
+                <a:lnTo>
+                  <a:pt x="117631" y="12979"/>
+                </a:lnTo>
+                <a:lnTo>
+                  <a:pt x="147039" y="20257"/>
+                </a:lnTo>
+                <a:lnTo>
+                  <a:pt x="176447" y="29131"/>
+                </a:lnTo>
+                <a:lnTo>
+                  <a:pt x="205854" y="39588"/>
+                </a:lnTo>
+                <a:lnTo>
+                  <a:pt x="235262" y="51613"/>
+                </a:lnTo>
+                <a:lnTo>
+                  <a:pt x="264670" y="65187"/>
+                </a:lnTo>
+                <a:lnTo>
+                  <a:pt x="294078" y="80292"/>
+                </a:lnTo>
+                <a:lnTo>
+                  <a:pt x="323486" y="96906"/>
+                </a:lnTo>
+                <a:lnTo>
+                  <a:pt x="352894" y="115004"/>
+                </a:lnTo>
+                <a:lnTo>
+                  <a:pt x="382301" y="134561"/>
+                </a:lnTo>
+                <a:lnTo>
+                  <a:pt x="411709" y="155548"/>
+                </a:lnTo>
+                <a:lnTo>
+                  <a:pt x="441117" y="177937"/>
+                </a:lnTo>
+                <a:lnTo>
+                  <a:pt x="470525" y="201695"/>
+                </a:lnTo>
+                <a:lnTo>
+                  <a:pt x="499933" y="226788"/>
+                </a:lnTo>
+                <a:lnTo>
+                  <a:pt x="529341" y="253182"/>
+                </a:lnTo>
+                <a:lnTo>
+                  <a:pt x="558748" y="280840"/>
+                </a:lnTo>
+                <a:lnTo>
+                  <a:pt x="588156" y="309723"/>
+                </a:lnTo>
+                <a:lnTo>
+                  <a:pt x="617564" y="339792"/>
+                </a:lnTo>
+                <a:lnTo>
+                  <a:pt x="646972" y="371006"/>
+                </a:lnTo>
+                <a:lnTo>
+                  <a:pt x="676380" y="403322"/>
+                </a:lnTo>
+                <a:lnTo>
+                  <a:pt x="705788" y="436697"/>
+                </a:lnTo>
+                <a:lnTo>
+                  <a:pt x="735195" y="471086"/>
+                </a:lnTo>
+                <a:lnTo>
+                  <a:pt x="764603" y="506444"/>
+                </a:lnTo>
+                <a:lnTo>
+                  <a:pt x="794011" y="542725"/>
+                </a:lnTo>
+                <a:lnTo>
+                  <a:pt x="823419" y="579881"/>
+                </a:lnTo>
+                <a:lnTo>
+                  <a:pt x="852827" y="617865"/>
+                </a:lnTo>
+                <a:lnTo>
+                  <a:pt x="882235" y="656628"/>
+                </a:lnTo>
+                <a:lnTo>
+                  <a:pt x="911643" y="696121"/>
+                </a:lnTo>
+                <a:lnTo>
+                  <a:pt x="941050" y="736296"/>
+                </a:lnTo>
+                <a:lnTo>
+                  <a:pt x="970458" y="777103"/>
+                </a:lnTo>
+                <a:lnTo>
+                  <a:pt x="999866" y="818493"/>
+                </a:lnTo>
+                <a:lnTo>
+                  <a:pt x="1029274" y="860415"/>
+                </a:lnTo>
+                <a:lnTo>
+                  <a:pt x="1058682" y="902821"/>
+                </a:lnTo>
+                <a:lnTo>
+                  <a:pt x="1088090" y="945660"/>
+                </a:lnTo>
+                <a:lnTo>
+                  <a:pt x="1117497" y="988885"/>
+                </a:lnTo>
+                <a:lnTo>
+                  <a:pt x="1146905" y="1032445"/>
+                </a:lnTo>
+                <a:lnTo>
+                  <a:pt x="1176313" y="1076293"/>
+                </a:lnTo>
+                <a:lnTo>
+                  <a:pt x="1205721" y="1120380"/>
+                </a:lnTo>
+                <a:lnTo>
+                  <a:pt x="1235129" y="1164659"/>
+                </a:lnTo>
+                <a:lnTo>
+                  <a:pt x="1264537" y="1209084"/>
+                </a:lnTo>
+                <a:lnTo>
+                  <a:pt x="1293944" y="1253608"/>
+                </a:lnTo>
+                <a:lnTo>
+                  <a:pt x="1323352" y="1298186"/>
+                </a:lnTo>
+                <a:lnTo>
+                  <a:pt x="1352760" y="1342775"/>
+                </a:lnTo>
+                <a:lnTo>
+                  <a:pt x="1382168" y="1387330"/>
+                </a:lnTo>
+                <a:lnTo>
+                  <a:pt x="1411576" y="1431810"/>
+                </a:lnTo>
+                <a:lnTo>
+                  <a:pt x="1440984" y="1476172"/>
+                </a:lnTo>
+                <a:lnTo>
+                  <a:pt x="1470391" y="1520378"/>
+                </a:lnTo>
+                <a:lnTo>
+                  <a:pt x="1499799" y="1564388"/>
+                </a:lnTo>
+                <a:lnTo>
+                  <a:pt x="1529207" y="1608164"/>
+                </a:lnTo>
+                <a:lnTo>
+                  <a:pt x="1558615" y="1651670"/>
+                </a:lnTo>
+                <a:lnTo>
+                  <a:pt x="1588023" y="1694870"/>
+                </a:lnTo>
+                <a:lnTo>
+                  <a:pt x="1617431" y="1737732"/>
+                </a:lnTo>
+                <a:lnTo>
+                  <a:pt x="1646838" y="1780222"/>
+                </a:lnTo>
+                <a:lnTo>
+                  <a:pt x="1676246" y="1822310"/>
+                </a:lnTo>
+                <a:lnTo>
+                  <a:pt x="1705654" y="1863966"/>
+                </a:lnTo>
+                <a:lnTo>
+                  <a:pt x="1735062" y="1905161"/>
+                </a:lnTo>
+                <a:lnTo>
+                  <a:pt x="1764470" y="1945869"/>
+                </a:lnTo>
+                <a:lnTo>
+                  <a:pt x="1793878" y="1986065"/>
+                </a:lnTo>
+                <a:lnTo>
+                  <a:pt x="1823286" y="2025725"/>
+                </a:lnTo>
+                <a:lnTo>
+                  <a:pt x="1852693" y="2064826"/>
+                </a:lnTo>
+                <a:lnTo>
+                  <a:pt x="1882101" y="2103348"/>
+                </a:lnTo>
+                <a:lnTo>
+                  <a:pt x="1911509" y="2141272"/>
+                </a:lnTo>
+                <a:lnTo>
+                  <a:pt x="1940917" y="2178579"/>
+                </a:lnTo>
+                <a:lnTo>
+                  <a:pt x="1970325" y="2215253"/>
+                </a:lnTo>
+                <a:lnTo>
+                  <a:pt x="1999733" y="2251279"/>
+                </a:lnTo>
+                <a:lnTo>
+                  <a:pt x="2029140" y="2286643"/>
+                </a:lnTo>
+                <a:lnTo>
+                  <a:pt x="2058548" y="2321334"/>
+                </a:lnTo>
+                <a:lnTo>
+                  <a:pt x="2087956" y="2355340"/>
+                </a:lnTo>
+                <a:lnTo>
+                  <a:pt x="2117364" y="2388652"/>
+                </a:lnTo>
+                <a:lnTo>
+                  <a:pt x="2146772" y="2421261"/>
+                </a:lnTo>
+                <a:lnTo>
+                  <a:pt x="2176180" y="2453161"/>
+                </a:lnTo>
+                <a:lnTo>
+                  <a:pt x="2205587" y="2484347"/>
+                </a:lnTo>
+                <a:lnTo>
+                  <a:pt x="2234995" y="2514813"/>
+                </a:lnTo>
+                <a:lnTo>
+                  <a:pt x="2264403" y="2544557"/>
+                </a:lnTo>
+                <a:lnTo>
+                  <a:pt x="2293811" y="2573576"/>
+                </a:lnTo>
+                <a:lnTo>
+                  <a:pt x="2323219" y="2601871"/>
+                </a:lnTo>
+                <a:lnTo>
+                  <a:pt x="2352627" y="2629440"/>
+                </a:lnTo>
+                <a:lnTo>
+                  <a:pt x="2382034" y="2656285"/>
+                </a:lnTo>
+                <a:lnTo>
+                  <a:pt x="2411442" y="2682409"/>
+                </a:lnTo>
+                <a:lnTo>
+                  <a:pt x="2440850" y="2707814"/>
+                </a:lnTo>
+                <a:lnTo>
+                  <a:pt x="2470258" y="2732505"/>
+                </a:lnTo>
+                <a:lnTo>
+                  <a:pt x="2499666" y="2756486"/>
+                </a:lnTo>
+                <a:lnTo>
+                  <a:pt x="2529074" y="2779763"/>
+                </a:lnTo>
+                <a:lnTo>
+                  <a:pt x="2558482" y="2802343"/>
+                </a:lnTo>
+                <a:lnTo>
+                  <a:pt x="2587889" y="2824233"/>
+                </a:lnTo>
+                <a:lnTo>
+                  <a:pt x="2617297" y="2845440"/>
+                </a:lnTo>
+                <a:lnTo>
+                  <a:pt x="2646705" y="2865975"/>
+                </a:lnTo>
+                <a:lnTo>
+                  <a:pt x="2676113" y="2885845"/>
+                </a:lnTo>
+                <a:lnTo>
+                  <a:pt x="2705521" y="2905060"/>
+                </a:lnTo>
+                <a:lnTo>
+                  <a:pt x="2734929" y="2923631"/>
+                </a:lnTo>
+                <a:lnTo>
+                  <a:pt x="2764336" y="2941569"/>
+                </a:lnTo>
+                <a:lnTo>
+                  <a:pt x="2793744" y="2958884"/>
+                </a:lnTo>
+                <a:lnTo>
+                  <a:pt x="2823152" y="2975589"/>
+                </a:lnTo>
+                <a:lnTo>
+                  <a:pt x="2852560" y="2991694"/>
+                </a:lnTo>
+                <a:lnTo>
+                  <a:pt x="2881968" y="3007213"/>
+                </a:lnTo>
+                <a:lnTo>
+                  <a:pt x="2911376" y="3022157"/>
+                </a:lnTo>
+                <a:lnTo>
+                  <a:pt x="2940783" y="3036540"/>
+                </a:lnTo>
+                <a:lnTo>
+                  <a:pt x="2970191" y="3050375"/>
+                </a:lnTo>
+                <a:lnTo>
+                  <a:pt x="2999599" y="3063674"/>
+                </a:lnTo>
+                <a:lnTo>
+                  <a:pt x="3029007" y="3076450"/>
+                </a:lnTo>
+                <a:lnTo>
+                  <a:pt x="3058415" y="3088718"/>
+                </a:lnTo>
+                <a:lnTo>
+                  <a:pt x="3087823" y="3100491"/>
+                </a:lnTo>
+                <a:lnTo>
+                  <a:pt x="3117230" y="3111781"/>
+                </a:lnTo>
+                <a:lnTo>
+                  <a:pt x="3146638" y="3122603"/>
+                </a:lnTo>
+                <a:lnTo>
+                  <a:pt x="3176046" y="3132970"/>
+                </a:lnTo>
+                <a:lnTo>
+                  <a:pt x="3205454" y="3142895"/>
+                </a:lnTo>
+                <a:lnTo>
+                  <a:pt x="3234862" y="3152392"/>
+                </a:lnTo>
+                <a:lnTo>
+                  <a:pt x="3264270" y="3161473"/>
+                </a:lnTo>
+                <a:lnTo>
+                  <a:pt x="3293677" y="3170153"/>
+                </a:lnTo>
+                <a:lnTo>
+                  <a:pt x="3323085" y="3178445"/>
+                </a:lnTo>
+                <a:lnTo>
+                  <a:pt x="3352493" y="3186360"/>
+                </a:lnTo>
+                <a:lnTo>
+                  <a:pt x="3381901" y="3193912"/>
+                </a:lnTo>
+                <a:lnTo>
+                  <a:pt x="3411309" y="3201114"/>
+                </a:lnTo>
+                <a:lnTo>
+                  <a:pt x="3440717" y="3207978"/>
+                </a:lnTo>
+                <a:lnTo>
+                  <a:pt x="3470125" y="3214516"/>
+                </a:lnTo>
+                <a:lnTo>
+                  <a:pt x="3499532" y="3220739"/>
+                </a:lnTo>
+                <a:lnTo>
+                  <a:pt x="3528940" y="3226661"/>
+                </a:lnTo>
+                <a:lnTo>
+                  <a:pt x="3558348" y="3232292"/>
+                </a:lnTo>
+                <a:lnTo>
+                  <a:pt x="3587756" y="3237643"/>
+                </a:lnTo>
+                <a:lnTo>
+                  <a:pt x="3617164" y="3242727"/>
+                </a:lnTo>
+                <a:lnTo>
+                  <a:pt x="3646572" y="3247552"/>
+                </a:lnTo>
+                <a:lnTo>
+                  <a:pt x="3675979" y="3252131"/>
+                </a:lnTo>
+                <a:lnTo>
+                  <a:pt x="3705387" y="3256473"/>
+                </a:lnTo>
+                <a:lnTo>
+                  <a:pt x="3734795" y="3260588"/>
+                </a:lnTo>
+                <a:lnTo>
+                  <a:pt x="3764203" y="3264486"/>
+                </a:lnTo>
+                <a:lnTo>
+                  <a:pt x="3793611" y="3268176"/>
+                </a:lnTo>
+                <a:lnTo>
+                  <a:pt x="3823019" y="3271667"/>
+                </a:lnTo>
+                <a:lnTo>
+                  <a:pt x="3852426" y="3274969"/>
+                </a:lnTo>
+                <a:lnTo>
+                  <a:pt x="3881834" y="3278090"/>
+                </a:lnTo>
+                <a:lnTo>
+                  <a:pt x="3911242" y="3281038"/>
+                </a:lnTo>
+                <a:lnTo>
+                  <a:pt x="3940650" y="3283821"/>
+                </a:lnTo>
+                <a:lnTo>
+                  <a:pt x="3970058" y="3286448"/>
+                </a:lnTo>
+                <a:lnTo>
+                  <a:pt x="3999466" y="3288924"/>
+                </a:lnTo>
+                <a:lnTo>
+                  <a:pt x="4028873" y="3291259"/>
+                </a:lnTo>
+                <a:lnTo>
+                  <a:pt x="4058281" y="3293458"/>
+                </a:lnTo>
+                <a:lnTo>
+                  <a:pt x="4087689" y="3295529"/>
+                </a:lnTo>
+                <a:lnTo>
+                  <a:pt x="4117097" y="3297478"/>
+                </a:lnTo>
+                <a:lnTo>
+                  <a:pt x="4146505" y="3299311"/>
+                </a:lnTo>
+                <a:lnTo>
+                  <a:pt x="4175913" y="3301034"/>
+                </a:lnTo>
+                <a:lnTo>
+                  <a:pt x="4205321" y="3302653"/>
+                </a:lnTo>
+                <a:lnTo>
+                  <a:pt x="4234728" y="3304173"/>
+                </a:lnTo>
+                <a:lnTo>
+                  <a:pt x="4264136" y="3305600"/>
+                </a:lnTo>
+                <a:lnTo>
+                  <a:pt x="4293544" y="3306938"/>
+                </a:lnTo>
+                <a:lnTo>
+                  <a:pt x="4322952" y="3308193"/>
+                </a:lnTo>
+                <a:lnTo>
+                  <a:pt x="4352360" y="3309368"/>
+                </a:lnTo>
+                <a:lnTo>
+                  <a:pt x="4381768" y="3310469"/>
+                </a:lnTo>
+                <a:lnTo>
+                  <a:pt x="4411175" y="3311500"/>
+                </a:lnTo>
+                <a:lnTo>
+                  <a:pt x="4440583" y="3312464"/>
+                </a:lnTo>
+                <a:lnTo>
+                  <a:pt x="4469991" y="3313365"/>
+                </a:lnTo>
+                <a:lnTo>
+                  <a:pt x="4499399" y="3314208"/>
+                </a:lnTo>
+                <a:lnTo>
+                  <a:pt x="4528807" y="3314994"/>
+                </a:lnTo>
+                <a:lnTo>
+                  <a:pt x="4558215" y="3315729"/>
+                </a:lnTo>
+                <a:lnTo>
+                  <a:pt x="4587622" y="3316414"/>
+                </a:lnTo>
+                <a:lnTo>
+                  <a:pt x="4617030" y="3317053"/>
+                </a:lnTo>
+                <a:lnTo>
+                  <a:pt x="4646438" y="3317649"/>
+                </a:lnTo>
+                <a:lnTo>
+                  <a:pt x="4675846" y="3318204"/>
+                </a:lnTo>
+                <a:lnTo>
+                  <a:pt x="4705254" y="3318720"/>
+                </a:lnTo>
+                <a:lnTo>
+                  <a:pt x="4734662" y="3319201"/>
+                </a:lnTo>
+                <a:lnTo>
+                  <a:pt x="4764069" y="3319648"/>
+                </a:lnTo>
+                <a:lnTo>
+                  <a:pt x="4793477" y="3320064"/>
+                </a:lnTo>
+                <a:lnTo>
+                  <a:pt x="4822885" y="3320450"/>
+                </a:lnTo>
+                <a:lnTo>
+                  <a:pt x="4852293" y="3320808"/>
+                </a:lnTo>
+                <a:lnTo>
+                  <a:pt x="4881701" y="3321141"/>
+                </a:lnTo>
+                <a:lnTo>
+                  <a:pt x="4911109" y="3321450"/>
+                </a:lnTo>
+                <a:lnTo>
+                  <a:pt x="4940516" y="3321736"/>
+                </a:lnTo>
+                <a:lnTo>
+                  <a:pt x="4969924" y="3322001"/>
+                </a:lnTo>
+                <a:lnTo>
+                  <a:pt x="4999332" y="3322247"/>
+                </a:lnTo>
+                <a:lnTo>
+                  <a:pt x="5028740" y="3322475"/>
+                </a:lnTo>
+                <a:lnTo>
+                  <a:pt x="5058148" y="3322685"/>
+                </a:lnTo>
+                <a:lnTo>
+                  <a:pt x="5087556" y="3322879"/>
+                </a:lnTo>
+                <a:lnTo>
+                  <a:pt x="5116964" y="3323059"/>
+                </a:lnTo>
+                <a:lnTo>
+                  <a:pt x="5146371" y="3323225"/>
+                </a:lnTo>
+                <a:lnTo>
+                  <a:pt x="5175779" y="3323379"/>
+                </a:lnTo>
+                <a:lnTo>
+                  <a:pt x="5205187" y="3323520"/>
+                </a:lnTo>
+                <a:lnTo>
+                  <a:pt x="5234595" y="3323651"/>
+                </a:lnTo>
+                <a:lnTo>
+                  <a:pt x="5264003" y="3323771"/>
+                </a:lnTo>
+                <a:lnTo>
+                  <a:pt x="5293411" y="3323882"/>
+                </a:lnTo>
+                <a:lnTo>
+                  <a:pt x="5322818" y="3323984"/>
+                </a:lnTo>
+                <a:lnTo>
+                  <a:pt x="5352226" y="3324078"/>
+                </a:lnTo>
+                <a:lnTo>
+                  <a:pt x="5381634" y="3324164"/>
+                </a:lnTo>
+                <a:lnTo>
+                  <a:pt x="5411042" y="3324244"/>
+                </a:lnTo>
+                <a:lnTo>
+                  <a:pt x="5440450" y="3324317"/>
+                </a:lnTo>
+                <a:lnTo>
+                  <a:pt x="5469858" y="3324384"/>
+                </a:lnTo>
+                <a:lnTo>
+                  <a:pt x="5499265" y="3324446"/>
+                </a:lnTo>
+                <a:lnTo>
+                  <a:pt x="5528673" y="3324502"/>
+                </a:lnTo>
+                <a:lnTo>
+                  <a:pt x="5558081" y="3324554"/>
+                </a:lnTo>
+                <a:lnTo>
+                  <a:pt x="5587489" y="3324601"/>
+                </a:lnTo>
+                <a:lnTo>
+                  <a:pt x="5616897" y="3324645"/>
+                </a:lnTo>
+                <a:lnTo>
+                  <a:pt x="5646305" y="3324685"/>
+                </a:lnTo>
+                <a:lnTo>
+                  <a:pt x="5675712" y="3324721"/>
+                </a:lnTo>
+                <a:lnTo>
+                  <a:pt x="5705120" y="3324754"/>
+                </a:lnTo>
+                <a:lnTo>
+                  <a:pt x="5734528" y="3324785"/>
+                </a:lnTo>
+                <a:lnTo>
+                  <a:pt x="5763936" y="3324813"/>
+                </a:lnTo>
+                <a:lnTo>
+                  <a:pt x="5793344" y="3324838"/>
+                </a:lnTo>
+                <a:lnTo>
+                  <a:pt x="5822752" y="3324861"/>
+                </a:lnTo>
+                <a:lnTo>
+                  <a:pt x="5852160" y="3324883"/>
+                </a:lnTo>
+              </a:path>
+            </a:pathLst>
+          </a:custGeom>
+          <a:noFill/>
+          <a:ln w="38100">
             <a:solidFill>
               <a:srgbClr val="8EDBD4"/>
             </a:solidFill>
           </a:ln>
           <a:effectLst/>
         </p:spPr>
-      </p:cxnSp>
+        <p:txBody>
+          <a:bodyPr rtlCol="0" anchor="ctr"/>
+          <a:lstStyle/>
+          <a:p>
+            <a:pPr algn="ctr"/>
+          </a:p>
+        </p:txBody>
+      </p:sp>
+      <p:sp>
+        <p:nvSpPr>
+          <p:cNvPr id="64" name="C2-E01 polygon 62" descr="sci-ppt:o062"/>
+          <p:cNvSpPr/>
+          <p:nvPr/>
+        </p:nvSpPr>
+        <p:spPr>
+          <a:xfrm>
+            <a:off x="5486400" y="1704109"/>
+            <a:ext cx="5852160" cy="3325091"/>
+          </a:xfrm>
+          <a:custGeom>
+            <a:avLst/>
+            <a:gdLst/>
+            <a:ahLst/>
+            <a:cxnLst/>
+            <a:rect l="l" t="t" r="r" b="b"/>
+            <a:pathLst>
+              <a:path w="5852160" h="3325091">
+                <a:moveTo>
+                  <a:pt x="0" y="0"/>
+                </a:moveTo>
+                <a:lnTo>
+                  <a:pt x="29407" y="812"/>
+                </a:lnTo>
+                <a:lnTo>
+                  <a:pt x="58815" y="3249"/>
+                </a:lnTo>
+                <a:lnTo>
+                  <a:pt x="88223" y="7307"/>
+                </a:lnTo>
+                <a:lnTo>
+                  <a:pt x="117631" y="12979"/>
+                </a:lnTo>
+                <a:lnTo>
+                  <a:pt x="147039" y="20257"/>
+                </a:lnTo>
+                <a:lnTo>
+                  <a:pt x="176447" y="29131"/>
+                </a:lnTo>
+                <a:lnTo>
+                  <a:pt x="205854" y="39588"/>
+                </a:lnTo>
+                <a:lnTo>
+                  <a:pt x="235262" y="51613"/>
+                </a:lnTo>
+                <a:lnTo>
+                  <a:pt x="264670" y="65187"/>
+                </a:lnTo>
+                <a:lnTo>
+                  <a:pt x="294078" y="80292"/>
+                </a:lnTo>
+                <a:lnTo>
+                  <a:pt x="323486" y="96906"/>
+                </a:lnTo>
+                <a:lnTo>
+                  <a:pt x="352894" y="115004"/>
+                </a:lnTo>
+                <a:lnTo>
+                  <a:pt x="382301" y="134561"/>
+                </a:lnTo>
+                <a:lnTo>
+                  <a:pt x="411709" y="155548"/>
+                </a:lnTo>
+                <a:lnTo>
+                  <a:pt x="441117" y="177937"/>
+                </a:lnTo>
+                <a:lnTo>
+                  <a:pt x="470525" y="201695"/>
+                </a:lnTo>
+                <a:lnTo>
+                  <a:pt x="499933" y="226788"/>
+                </a:lnTo>
+                <a:lnTo>
+                  <a:pt x="529341" y="253182"/>
+                </a:lnTo>
+                <a:lnTo>
+                  <a:pt x="558748" y="280840"/>
+                </a:lnTo>
+                <a:lnTo>
+                  <a:pt x="588156" y="309723"/>
+                </a:lnTo>
+                <a:lnTo>
+                  <a:pt x="617564" y="339792"/>
+                </a:lnTo>
+                <a:lnTo>
+                  <a:pt x="646972" y="371006"/>
+                </a:lnTo>
+                <a:lnTo>
+                  <a:pt x="676380" y="403322"/>
+                </a:lnTo>
+                <a:lnTo>
+                  <a:pt x="705788" y="436697"/>
+                </a:lnTo>
+                <a:lnTo>
+                  <a:pt x="735195" y="471086"/>
+                </a:lnTo>
+                <a:lnTo>
+                  <a:pt x="764603" y="506444"/>
+                </a:lnTo>
+                <a:lnTo>
+                  <a:pt x="794011" y="542725"/>
+                </a:lnTo>
+                <a:lnTo>
+                  <a:pt x="823419" y="579881"/>
+                </a:lnTo>
+                <a:lnTo>
+                  <a:pt x="852827" y="617865"/>
+                </a:lnTo>
+                <a:lnTo>
+                  <a:pt x="882235" y="656628"/>
+                </a:lnTo>
+                <a:lnTo>
+                  <a:pt x="911643" y="696121"/>
+                </a:lnTo>
+                <a:lnTo>
+                  <a:pt x="941050" y="736296"/>
+                </a:lnTo>
+                <a:lnTo>
+                  <a:pt x="970458" y="777103"/>
+                </a:lnTo>
+                <a:lnTo>
+                  <a:pt x="999866" y="818493"/>
+                </a:lnTo>
+                <a:lnTo>
+                  <a:pt x="1029274" y="860415"/>
+                </a:lnTo>
+                <a:lnTo>
+                  <a:pt x="1058682" y="902821"/>
+                </a:lnTo>
+                <a:lnTo>
+                  <a:pt x="1088090" y="945660"/>
+                </a:lnTo>
+                <a:lnTo>
+                  <a:pt x="1117497" y="988885"/>
+                </a:lnTo>
+                <a:lnTo>
+                  <a:pt x="1146905" y="1032445"/>
+                </a:lnTo>
+                <a:lnTo>
+                  <a:pt x="1176313" y="1076293"/>
+                </a:lnTo>
+                <a:lnTo>
+                  <a:pt x="1205721" y="1120380"/>
+                </a:lnTo>
+                <a:lnTo>
+                  <a:pt x="1235129" y="1164659"/>
+                </a:lnTo>
+                <a:lnTo>
+                  <a:pt x="1264537" y="1209084"/>
+                </a:lnTo>
+                <a:lnTo>
+                  <a:pt x="1293944" y="1253608"/>
+                </a:lnTo>
+                <a:lnTo>
+                  <a:pt x="1323352" y="1298186"/>
+                </a:lnTo>
+                <a:lnTo>
+                  <a:pt x="1352760" y="1342775"/>
+                </a:lnTo>
+                <a:lnTo>
+                  <a:pt x="1382168" y="1387330"/>
+                </a:lnTo>
+                <a:lnTo>
+                  <a:pt x="1411576" y="1431810"/>
+                </a:lnTo>
+                <a:lnTo>
+                  <a:pt x="1440984" y="1476172"/>
+                </a:lnTo>
+                <a:lnTo>
+                  <a:pt x="1470391" y="1520378"/>
+                </a:lnTo>
+                <a:lnTo>
+                  <a:pt x="1499799" y="1564388"/>
+                </a:lnTo>
+                <a:lnTo>
+                  <a:pt x="1529207" y="1608164"/>
+                </a:lnTo>
+                <a:lnTo>
+                  <a:pt x="1558615" y="1651670"/>
+                </a:lnTo>
+                <a:lnTo>
+                  <a:pt x="1588023" y="1694870"/>
+                </a:lnTo>
+                <a:lnTo>
+                  <a:pt x="1617431" y="1737732"/>
+                </a:lnTo>
+                <a:lnTo>
+                  <a:pt x="1646838" y="1780222"/>
+                </a:lnTo>
+                <a:lnTo>
+                  <a:pt x="1676246" y="1822310"/>
+                </a:lnTo>
+                <a:lnTo>
+                  <a:pt x="1705654" y="1863966"/>
+                </a:lnTo>
+                <a:lnTo>
+                  <a:pt x="1735062" y="1905161"/>
+                </a:lnTo>
+                <a:lnTo>
+                  <a:pt x="1764470" y="1945869"/>
+                </a:lnTo>
+                <a:lnTo>
+                  <a:pt x="1793878" y="1986065"/>
+                </a:lnTo>
+                <a:lnTo>
+                  <a:pt x="1823286" y="2025725"/>
+                </a:lnTo>
+                <a:lnTo>
+                  <a:pt x="1852693" y="2064826"/>
+                </a:lnTo>
+                <a:lnTo>
+                  <a:pt x="1882101" y="2103348"/>
+                </a:lnTo>
+                <a:lnTo>
+                  <a:pt x="1911509" y="2141272"/>
+                </a:lnTo>
+                <a:lnTo>
+                  <a:pt x="1940917" y="2178579"/>
+                </a:lnTo>
+                <a:lnTo>
+                  <a:pt x="1970325" y="2215253"/>
+                </a:lnTo>
+                <a:lnTo>
+                  <a:pt x="1999733" y="2251279"/>
+                </a:lnTo>
+                <a:lnTo>
+                  <a:pt x="2029140" y="2286643"/>
+                </a:lnTo>
+                <a:lnTo>
+                  <a:pt x="2058548" y="2321334"/>
+                </a:lnTo>
+                <a:lnTo>
+                  <a:pt x="2087956" y="2355340"/>
+                </a:lnTo>
+                <a:lnTo>
+                  <a:pt x="2117364" y="2388652"/>
+                </a:lnTo>
+                <a:lnTo>
+                  <a:pt x="2146772" y="2421261"/>
+                </a:lnTo>
+                <a:lnTo>
+                  <a:pt x="2176180" y="2453161"/>
+                </a:lnTo>
+                <a:lnTo>
+                  <a:pt x="2205587" y="2484347"/>
+                </a:lnTo>
+                <a:lnTo>
+                  <a:pt x="2234995" y="2514813"/>
+                </a:lnTo>
+                <a:lnTo>
+                  <a:pt x="2264403" y="2544557"/>
+                </a:lnTo>
+                <a:lnTo>
+                  <a:pt x="2293811" y="2573576"/>
+                </a:lnTo>
+                <a:lnTo>
+                  <a:pt x="2323219" y="2601871"/>
+                </a:lnTo>
+                <a:lnTo>
+                  <a:pt x="2352627" y="2629440"/>
+                </a:lnTo>
+                <a:lnTo>
+                  <a:pt x="2382034" y="2656285"/>
+                </a:lnTo>
+                <a:lnTo>
+                  <a:pt x="2411442" y="2682409"/>
+                </a:lnTo>
+                <a:lnTo>
+                  <a:pt x="2440850" y="2707814"/>
+                </a:lnTo>
+                <a:lnTo>
+                  <a:pt x="2470258" y="2732505"/>
+                </a:lnTo>
+                <a:lnTo>
+                  <a:pt x="2499666" y="2756486"/>
+                </a:lnTo>
+                <a:lnTo>
+                  <a:pt x="2529074" y="2779763"/>
+                </a:lnTo>
+                <a:lnTo>
+                  <a:pt x="2558482" y="2802343"/>
+                </a:lnTo>
+                <a:lnTo>
+                  <a:pt x="2587889" y="2824233"/>
+                </a:lnTo>
+                <a:lnTo>
+                  <a:pt x="2617297" y="2845440"/>
+                </a:lnTo>
+                <a:lnTo>
+                  <a:pt x="2646705" y="2865975"/>
+                </a:lnTo>
+                <a:lnTo>
+                  <a:pt x="2676113" y="2885845"/>
+                </a:lnTo>
+                <a:lnTo>
+                  <a:pt x="2705521" y="2905060"/>
+                </a:lnTo>
+                <a:lnTo>
+                  <a:pt x="2734929" y="2923631"/>
+                </a:lnTo>
+                <a:lnTo>
+                  <a:pt x="2764336" y="2941569"/>
+                </a:lnTo>
+                <a:lnTo>
+                  <a:pt x="2793744" y="2958884"/>
+                </a:lnTo>
+                <a:lnTo>
+                  <a:pt x="2823152" y="2975589"/>
+                </a:lnTo>
+                <a:lnTo>
+                  <a:pt x="2852560" y="2991694"/>
+                </a:lnTo>
+                <a:lnTo>
+                  <a:pt x="2881968" y="3007213"/>
+                </a:lnTo>
+                <a:lnTo>
+                  <a:pt x="2911376" y="3022157"/>
+                </a:lnTo>
+                <a:lnTo>
+                  <a:pt x="2940783" y="3036540"/>
+                </a:lnTo>
+                <a:lnTo>
+                  <a:pt x="2970191" y="3050375"/>
+                </a:lnTo>
+                <a:lnTo>
+                  <a:pt x="2999599" y="3063674"/>
+                </a:lnTo>
+                <a:lnTo>
+                  <a:pt x="3029007" y="3076450"/>
+                </a:lnTo>
+                <a:lnTo>
+                  <a:pt x="3058415" y="3088718"/>
+                </a:lnTo>
+                <a:lnTo>
+                  <a:pt x="3087823" y="3100491"/>
+                </a:lnTo>
+                <a:lnTo>
+                  <a:pt x="3117230" y="3111781"/>
+                </a:lnTo>
+                <a:lnTo>
+                  <a:pt x="3146638" y="3122603"/>
+                </a:lnTo>
+                <a:lnTo>
+                  <a:pt x="3176046" y="3132970"/>
+                </a:lnTo>
+                <a:lnTo>
+                  <a:pt x="3205454" y="3142895"/>
+                </a:lnTo>
+                <a:lnTo>
+                  <a:pt x="3234862" y="3152392"/>
+                </a:lnTo>
+                <a:lnTo>
+                  <a:pt x="3264270" y="3161473"/>
+                </a:lnTo>
+                <a:lnTo>
+                  <a:pt x="3293677" y="3170153"/>
+                </a:lnTo>
+                <a:lnTo>
+                  <a:pt x="3323085" y="3178445"/>
+                </a:lnTo>
+                <a:lnTo>
+                  <a:pt x="3352493" y="3186360"/>
+                </a:lnTo>
+                <a:lnTo>
+                  <a:pt x="3381901" y="3193912"/>
+                </a:lnTo>
+                <a:lnTo>
+                  <a:pt x="3411309" y="3201114"/>
+                </a:lnTo>
+                <a:lnTo>
+                  <a:pt x="3440717" y="3207978"/>
+                </a:lnTo>
+                <a:lnTo>
+                  <a:pt x="3470125" y="3214516"/>
+                </a:lnTo>
+                <a:lnTo>
+                  <a:pt x="3499532" y="3220739"/>
+                </a:lnTo>
+                <a:lnTo>
+                  <a:pt x="3528940" y="3226661"/>
+                </a:lnTo>
+                <a:lnTo>
+                  <a:pt x="3558348" y="3232292"/>
+                </a:lnTo>
+                <a:lnTo>
+                  <a:pt x="3587756" y="3237643"/>
+                </a:lnTo>
+                <a:lnTo>
+                  <a:pt x="3617164" y="3242727"/>
+                </a:lnTo>
+                <a:lnTo>
+                  <a:pt x="3646572" y="3247552"/>
+                </a:lnTo>
+                <a:lnTo>
+                  <a:pt x="3675979" y="3252131"/>
+                </a:lnTo>
+                <a:lnTo>
+                  <a:pt x="3705387" y="3256473"/>
+                </a:lnTo>
+                <a:lnTo>
+                  <a:pt x="3734795" y="3260588"/>
+                </a:lnTo>
+                <a:lnTo>
+                  <a:pt x="3764203" y="3264486"/>
+                </a:lnTo>
+                <a:lnTo>
+                  <a:pt x="3793611" y="3268176"/>
+                </a:lnTo>
+                <a:lnTo>
+                  <a:pt x="3823019" y="3271667"/>
+                </a:lnTo>
+                <a:lnTo>
+                  <a:pt x="3852426" y="3274969"/>
+                </a:lnTo>
+                <a:lnTo>
+                  <a:pt x="3881834" y="3278090"/>
+                </a:lnTo>
+                <a:lnTo>
+                  <a:pt x="3911242" y="3281038"/>
+                </a:lnTo>
+                <a:lnTo>
+                  <a:pt x="3940650" y="3283821"/>
+                </a:lnTo>
+                <a:lnTo>
+                  <a:pt x="3970058" y="3286448"/>
+                </a:lnTo>
+                <a:lnTo>
+                  <a:pt x="3999466" y="3288924"/>
+                </a:lnTo>
+                <a:lnTo>
+                  <a:pt x="4028873" y="3291259"/>
+                </a:lnTo>
+                <a:lnTo>
+                  <a:pt x="4058281" y="3293458"/>
+                </a:lnTo>
+                <a:lnTo>
+                  <a:pt x="4087689" y="3295529"/>
+                </a:lnTo>
+                <a:lnTo>
+                  <a:pt x="4117097" y="3297478"/>
+                </a:lnTo>
+                <a:lnTo>
+                  <a:pt x="4146505" y="3299311"/>
+                </a:lnTo>
+                <a:lnTo>
+                  <a:pt x="4175913" y="3301034"/>
+                </a:lnTo>
+                <a:lnTo>
+                  <a:pt x="4205321" y="3302653"/>
+                </a:lnTo>
+                <a:lnTo>
+                  <a:pt x="4234728" y="3304173"/>
+                </a:lnTo>
+                <a:lnTo>
+                  <a:pt x="4264136" y="3305600"/>
+                </a:lnTo>
+                <a:lnTo>
+                  <a:pt x="4293544" y="3306938"/>
+                </a:lnTo>
+                <a:lnTo>
+                  <a:pt x="4322952" y="3308193"/>
+                </a:lnTo>
+                <a:lnTo>
+                  <a:pt x="4352360" y="3309368"/>
+                </a:lnTo>
+                <a:lnTo>
+                  <a:pt x="4381768" y="3310469"/>
+                </a:lnTo>
+                <a:lnTo>
+                  <a:pt x="4411175" y="3311500"/>
+                </a:lnTo>
+                <a:lnTo>
+                  <a:pt x="4440583" y="3312464"/>
+                </a:lnTo>
+                <a:lnTo>
+                  <a:pt x="4469991" y="3313365"/>
+                </a:lnTo>
+                <a:lnTo>
+                  <a:pt x="4499399" y="3314208"/>
+                </a:lnTo>
+                <a:lnTo>
+                  <a:pt x="4528807" y="3314994"/>
+                </a:lnTo>
+                <a:lnTo>
+                  <a:pt x="4558215" y="3315729"/>
+                </a:lnTo>
+                <a:lnTo>
+                  <a:pt x="4587622" y="3316414"/>
+                </a:lnTo>
+                <a:lnTo>
+                  <a:pt x="4617030" y="3317053"/>
+                </a:lnTo>
+                <a:lnTo>
+                  <a:pt x="4646438" y="3317649"/>
+                </a:lnTo>
+                <a:lnTo>
+                  <a:pt x="4675846" y="3318204"/>
+                </a:lnTo>
+                <a:lnTo>
+                  <a:pt x="4705254" y="3318720"/>
+                </a:lnTo>
+                <a:lnTo>
+                  <a:pt x="4734662" y="3319201"/>
+                </a:lnTo>
+                <a:lnTo>
+                  <a:pt x="4764069" y="3319648"/>
+                </a:lnTo>
+                <a:lnTo>
+                  <a:pt x="4793477" y="3320064"/>
+                </a:lnTo>
+                <a:lnTo>
+                  <a:pt x="4822885" y="3320450"/>
+                </a:lnTo>
+                <a:lnTo>
+                  <a:pt x="4852293" y="3320808"/>
+                </a:lnTo>
+                <a:lnTo>
+                  <a:pt x="4881701" y="3321141"/>
+                </a:lnTo>
+                <a:lnTo>
+                  <a:pt x="4911109" y="3321450"/>
+                </a:lnTo>
+                <a:lnTo>
+                  <a:pt x="4940516" y="3321736"/>
+                </a:lnTo>
+                <a:lnTo>
+                  <a:pt x="4969924" y="3322001"/>
+                </a:lnTo>
+                <a:lnTo>
+                  <a:pt x="4999332" y="3322247"/>
+                </a:lnTo>
+                <a:lnTo>
+                  <a:pt x="5028740" y="3322475"/>
+                </a:lnTo>
+                <a:lnTo>
+                  <a:pt x="5058148" y="3322685"/>
+                </a:lnTo>
+                <a:lnTo>
+                  <a:pt x="5087556" y="3322879"/>
+                </a:lnTo>
+                <a:lnTo>
+                  <a:pt x="5116964" y="3323059"/>
+                </a:lnTo>
+                <a:lnTo>
+                  <a:pt x="5146371" y="3323225"/>
+                </a:lnTo>
+                <a:lnTo>
+                  <a:pt x="5175779" y="3323379"/>
+                </a:lnTo>
+                <a:lnTo>
+                  <a:pt x="5205187" y="3323520"/>
+                </a:lnTo>
+                <a:lnTo>
+                  <a:pt x="5234595" y="3323651"/>
+                </a:lnTo>
+                <a:lnTo>
+                  <a:pt x="5264003" y="3323771"/>
+                </a:lnTo>
+                <a:lnTo>
+                  <a:pt x="5293411" y="3323882"/>
+                </a:lnTo>
+                <a:lnTo>
+                  <a:pt x="5322818" y="3323984"/>
+                </a:lnTo>
+                <a:lnTo>
+                  <a:pt x="5352226" y="3324078"/>
+                </a:lnTo>
+                <a:lnTo>
+                  <a:pt x="5381634" y="3324164"/>
+                </a:lnTo>
+                <a:lnTo>
+                  <a:pt x="5411042" y="3324244"/>
+                </a:lnTo>
+                <a:lnTo>
+                  <a:pt x="5440450" y="3324317"/>
+                </a:lnTo>
+                <a:lnTo>
+                  <a:pt x="5469858" y="3324384"/>
+                </a:lnTo>
+                <a:lnTo>
+                  <a:pt x="5499265" y="3324446"/>
+                </a:lnTo>
+                <a:lnTo>
+                  <a:pt x="5528673" y="3324502"/>
+                </a:lnTo>
+                <a:lnTo>
+                  <a:pt x="5558081" y="3324554"/>
+                </a:lnTo>
+                <a:lnTo>
+                  <a:pt x="5587489" y="3324601"/>
+                </a:lnTo>
+                <a:lnTo>
+                  <a:pt x="5616897" y="3324645"/>
+                </a:lnTo>
+                <a:lnTo>
+                  <a:pt x="5646305" y="3324685"/>
+                </a:lnTo>
+                <a:lnTo>
+                  <a:pt x="5675712" y="3324721"/>
+                </a:lnTo>
+                <a:lnTo>
+                  <a:pt x="5705120" y="3324754"/>
+                </a:lnTo>
+                <a:lnTo>
+                  <a:pt x="5734528" y="3324785"/>
+                </a:lnTo>
+                <a:lnTo>
+                  <a:pt x="5763936" y="3324813"/>
+                </a:lnTo>
+                <a:lnTo>
+                  <a:pt x="5793344" y="3324838"/>
+                </a:lnTo>
+                <a:lnTo>
+                  <a:pt x="5822752" y="3324861"/>
+                </a:lnTo>
+                <a:lnTo>
+                  <a:pt x="5852160" y="3324883"/>
+                </a:lnTo>
+                <a:lnTo>
+                  <a:pt x="5852160" y="3325091"/>
+                </a:lnTo>
+                <a:lnTo>
+                  <a:pt x="5822752" y="3325091"/>
+                </a:lnTo>
+                <a:lnTo>
+                  <a:pt x="5793344" y="3325091"/>
+                </a:lnTo>
+                <a:lnTo>
+                  <a:pt x="5763936" y="3325091"/>
+                </a:lnTo>
+                <a:lnTo>
+                  <a:pt x="5734528" y="3325091"/>
+                </a:lnTo>
+                <a:lnTo>
+                  <a:pt x="5705120" y="3325091"/>
+                </a:lnTo>
+                <a:lnTo>
+                  <a:pt x="5675712" y="3325091"/>
+                </a:lnTo>
+                <a:lnTo>
+                  <a:pt x="5646305" y="3325091"/>
+                </a:lnTo>
+                <a:lnTo>
+                  <a:pt x="5616897" y="3325091"/>
+                </a:lnTo>
+                <a:lnTo>
+                  <a:pt x="5587489" y="3325091"/>
+                </a:lnTo>
+                <a:lnTo>
+                  <a:pt x="5558081" y="3325091"/>
+                </a:lnTo>
+                <a:lnTo>
+                  <a:pt x="5528673" y="3325091"/>
+                </a:lnTo>
+                <a:lnTo>
+                  <a:pt x="5499265" y="3325091"/>
+                </a:lnTo>
+                <a:lnTo>
+                  <a:pt x="5469858" y="3325091"/>
+                </a:lnTo>
+                <a:lnTo>
+                  <a:pt x="5440450" y="3325091"/>
+                </a:lnTo>
+                <a:lnTo>
+                  <a:pt x="5411042" y="3325091"/>
+                </a:lnTo>
+                <a:lnTo>
+                  <a:pt x="5381634" y="3325091"/>
+                </a:lnTo>
+                <a:lnTo>
+                  <a:pt x="5352226" y="3325091"/>
+                </a:lnTo>
+                <a:lnTo>
+                  <a:pt x="5322818" y="3325091"/>
+                </a:lnTo>
+                <a:lnTo>
+                  <a:pt x="5293411" y="3325091"/>
+                </a:lnTo>
+                <a:lnTo>
+                  <a:pt x="5264003" y="3325091"/>
+                </a:lnTo>
+                <a:lnTo>
+                  <a:pt x="5234595" y="3325091"/>
+                </a:lnTo>
+                <a:lnTo>
+                  <a:pt x="5205187" y="3325091"/>
+                </a:lnTo>
+                <a:lnTo>
+                  <a:pt x="5175779" y="3325091"/>
+                </a:lnTo>
+                <a:lnTo>
+                  <a:pt x="5146371" y="3325091"/>
+                </a:lnTo>
+                <a:lnTo>
+                  <a:pt x="5116964" y="3325091"/>
+                </a:lnTo>
+                <a:lnTo>
+                  <a:pt x="5087556" y="3325091"/>
+                </a:lnTo>
+                <a:lnTo>
+                  <a:pt x="5058148" y="3325091"/>
+                </a:lnTo>
+                <a:lnTo>
+                  <a:pt x="5028740" y="3325091"/>
+                </a:lnTo>
+                <a:lnTo>
+                  <a:pt x="4999332" y="3325091"/>
+                </a:lnTo>
+                <a:lnTo>
+                  <a:pt x="4969924" y="3325091"/>
+                </a:lnTo>
+                <a:lnTo>
+                  <a:pt x="4940516" y="3325091"/>
+                </a:lnTo>
+                <a:lnTo>
+                  <a:pt x="4911109" y="3325091"/>
+                </a:lnTo>
+                <a:lnTo>
+                  <a:pt x="4881701" y="3325091"/>
+                </a:lnTo>
+                <a:lnTo>
+                  <a:pt x="4852293" y="3325091"/>
+                </a:lnTo>
+                <a:lnTo>
+                  <a:pt x="4822885" y="3325091"/>
+                </a:lnTo>
+                <a:lnTo>
+                  <a:pt x="4793477" y="3325091"/>
+                </a:lnTo>
+                <a:lnTo>
+                  <a:pt x="4764069" y="3325091"/>
+                </a:lnTo>
+                <a:lnTo>
+                  <a:pt x="4734662" y="3325091"/>
+                </a:lnTo>
+                <a:lnTo>
+                  <a:pt x="4705254" y="3325091"/>
+                </a:lnTo>
+                <a:lnTo>
+                  <a:pt x="4675846" y="3325091"/>
+                </a:lnTo>
+                <a:lnTo>
+                  <a:pt x="4646438" y="3325091"/>
+                </a:lnTo>
+                <a:lnTo>
+                  <a:pt x="4617030" y="3325091"/>
+                </a:lnTo>
+                <a:lnTo>
+                  <a:pt x="4587622" y="3325091"/>
+                </a:lnTo>
+                <a:lnTo>
+                  <a:pt x="4558215" y="3325091"/>
+                </a:lnTo>
+                <a:lnTo>
+                  <a:pt x="4528807" y="3325091"/>
+                </a:lnTo>
+                <a:lnTo>
+                  <a:pt x="4499399" y="3325091"/>
+                </a:lnTo>
+                <a:lnTo>
+                  <a:pt x="4469991" y="3325091"/>
+                </a:lnTo>
+                <a:lnTo>
+                  <a:pt x="4440583" y="3325091"/>
+                </a:lnTo>
+                <a:lnTo>
+                  <a:pt x="4411175" y="3325091"/>
+                </a:lnTo>
+                <a:lnTo>
+                  <a:pt x="4381768" y="3325091"/>
+                </a:lnTo>
+                <a:lnTo>
+                  <a:pt x="4352360" y="3325091"/>
+                </a:lnTo>
+                <a:lnTo>
+                  <a:pt x="4322952" y="3325091"/>
+                </a:lnTo>
+                <a:lnTo>
+                  <a:pt x="4293544" y="3325091"/>
+                </a:lnTo>
+                <a:lnTo>
+                  <a:pt x="4264136" y="3325091"/>
+                </a:lnTo>
+                <a:lnTo>
+                  <a:pt x="4234728" y="3325091"/>
+                </a:lnTo>
+                <a:lnTo>
+                  <a:pt x="4205321" y="3325091"/>
+                </a:lnTo>
+                <a:lnTo>
+                  <a:pt x="4175913" y="3325091"/>
+                </a:lnTo>
+                <a:lnTo>
+                  <a:pt x="4146505" y="3325091"/>
+                </a:lnTo>
+                <a:lnTo>
+                  <a:pt x="4117097" y="3325091"/>
+                </a:lnTo>
+                <a:lnTo>
+                  <a:pt x="4087689" y="3325091"/>
+                </a:lnTo>
+                <a:lnTo>
+                  <a:pt x="4058281" y="3325091"/>
+                </a:lnTo>
+                <a:lnTo>
+                  <a:pt x="4028873" y="3325091"/>
+                </a:lnTo>
+                <a:lnTo>
+                  <a:pt x="3999466" y="3325091"/>
+                </a:lnTo>
+                <a:lnTo>
+                  <a:pt x="3970058" y="3325091"/>
+                </a:lnTo>
+                <a:lnTo>
+                  <a:pt x="3940650" y="3325091"/>
+                </a:lnTo>
+                <a:lnTo>
+                  <a:pt x="3911242" y="3325091"/>
+                </a:lnTo>
+                <a:lnTo>
+                  <a:pt x="3881834" y="3325091"/>
+                </a:lnTo>
+                <a:lnTo>
+                  <a:pt x="3852426" y="3325091"/>
+                </a:lnTo>
+                <a:lnTo>
+                  <a:pt x="3823019" y="3325091"/>
+                </a:lnTo>
+                <a:lnTo>
+                  <a:pt x="3793611" y="3325091"/>
+                </a:lnTo>
+                <a:lnTo>
+                  <a:pt x="3764203" y="3325091"/>
+                </a:lnTo>
+                <a:lnTo>
+                  <a:pt x="3734795" y="3325091"/>
+                </a:lnTo>
+                <a:lnTo>
+                  <a:pt x="3705387" y="3325091"/>
+                </a:lnTo>
+                <a:lnTo>
+                  <a:pt x="3675979" y="3325091"/>
+                </a:lnTo>
+                <a:lnTo>
+                  <a:pt x="3646572" y="3325091"/>
+                </a:lnTo>
+                <a:lnTo>
+                  <a:pt x="3617164" y="3325091"/>
+                </a:lnTo>
+                <a:lnTo>
+                  <a:pt x="3587756" y="3325091"/>
+                </a:lnTo>
+                <a:lnTo>
+                  <a:pt x="3558348" y="3325091"/>
+                </a:lnTo>
+                <a:lnTo>
+                  <a:pt x="3528940" y="3325091"/>
+                </a:lnTo>
+                <a:lnTo>
+                  <a:pt x="3499532" y="3325091"/>
+                </a:lnTo>
+                <a:lnTo>
+                  <a:pt x="3470125" y="3325091"/>
+                </a:lnTo>
+                <a:lnTo>
+                  <a:pt x="3440717" y="3325091"/>
+                </a:lnTo>
+                <a:lnTo>
+                  <a:pt x="3411309" y="3325091"/>
+                </a:lnTo>
+                <a:lnTo>
+                  <a:pt x="3381901" y="3325091"/>
+                </a:lnTo>
+                <a:lnTo>
+                  <a:pt x="3352493" y="3325091"/>
+                </a:lnTo>
+                <a:lnTo>
+                  <a:pt x="3323085" y="3325091"/>
+                </a:lnTo>
+                <a:lnTo>
+                  <a:pt x="3293677" y="3325091"/>
+                </a:lnTo>
+                <a:lnTo>
+                  <a:pt x="3264270" y="3325091"/>
+                </a:lnTo>
+                <a:lnTo>
+                  <a:pt x="3234862" y="3325091"/>
+                </a:lnTo>
+                <a:lnTo>
+                  <a:pt x="3205454" y="3325091"/>
+                </a:lnTo>
+                <a:lnTo>
+                  <a:pt x="3176046" y="3325091"/>
+                </a:lnTo>
+                <a:lnTo>
+                  <a:pt x="3146638" y="3325091"/>
+                </a:lnTo>
+                <a:lnTo>
+                  <a:pt x="3117230" y="3325091"/>
+                </a:lnTo>
+                <a:lnTo>
+                  <a:pt x="3087823" y="3325091"/>
+                </a:lnTo>
+                <a:lnTo>
+                  <a:pt x="3058415" y="3325091"/>
+                </a:lnTo>
+                <a:lnTo>
+                  <a:pt x="3029007" y="3325091"/>
+                </a:lnTo>
+                <a:lnTo>
+                  <a:pt x="2999599" y="3325091"/>
+                </a:lnTo>
+                <a:lnTo>
+                  <a:pt x="2970191" y="3325091"/>
+                </a:lnTo>
+                <a:lnTo>
+                  <a:pt x="2940783" y="3325091"/>
+                </a:lnTo>
+                <a:lnTo>
+                  <a:pt x="2911376" y="3325091"/>
+                </a:lnTo>
+                <a:lnTo>
+                  <a:pt x="2881968" y="3325091"/>
+                </a:lnTo>
+                <a:lnTo>
+                  <a:pt x="2852560" y="3325091"/>
+                </a:lnTo>
+                <a:lnTo>
+                  <a:pt x="2823152" y="3325091"/>
+                </a:lnTo>
+                <a:lnTo>
+                  <a:pt x="2793744" y="3325091"/>
+                </a:lnTo>
+                <a:lnTo>
+                  <a:pt x="2764336" y="3325091"/>
+                </a:lnTo>
+                <a:lnTo>
+                  <a:pt x="2734929" y="3325091"/>
+                </a:lnTo>
+                <a:lnTo>
+                  <a:pt x="2705521" y="3325091"/>
+                </a:lnTo>
+                <a:lnTo>
+                  <a:pt x="2676113" y="3325091"/>
+                </a:lnTo>
+                <a:lnTo>
+                  <a:pt x="2646705" y="3325091"/>
+                </a:lnTo>
+                <a:lnTo>
+                  <a:pt x="2617297" y="3325091"/>
+                </a:lnTo>
+                <a:lnTo>
+                  <a:pt x="2587889" y="3325091"/>
+                </a:lnTo>
+                <a:lnTo>
+                  <a:pt x="2558482" y="3325091"/>
+                </a:lnTo>
+                <a:lnTo>
+                  <a:pt x="2529074" y="3325091"/>
+                </a:lnTo>
+                <a:lnTo>
+                  <a:pt x="2499666" y="3325091"/>
+                </a:lnTo>
+                <a:lnTo>
+                  <a:pt x="2470258" y="3325091"/>
+                </a:lnTo>
+                <a:lnTo>
+                  <a:pt x="2440850" y="3325091"/>
+                </a:lnTo>
+                <a:lnTo>
+                  <a:pt x="2411442" y="3325091"/>
+                </a:lnTo>
+                <a:lnTo>
+                  <a:pt x="2382034" y="3325091"/>
+                </a:lnTo>
+                <a:lnTo>
+                  <a:pt x="2352627" y="3325091"/>
+                </a:lnTo>
+                <a:lnTo>
+                  <a:pt x="2323219" y="3325091"/>
+                </a:lnTo>
+                <a:lnTo>
+                  <a:pt x="2293811" y="3325091"/>
+                </a:lnTo>
+                <a:lnTo>
+                  <a:pt x="2264403" y="3325091"/>
+                </a:lnTo>
+                <a:lnTo>
+                  <a:pt x="2234995" y="3325091"/>
+                </a:lnTo>
+                <a:lnTo>
+                  <a:pt x="2205587" y="3325091"/>
+                </a:lnTo>
+                <a:lnTo>
+                  <a:pt x="2176180" y="3325091"/>
+                </a:lnTo>
+                <a:lnTo>
+                  <a:pt x="2146772" y="3325091"/>
+                </a:lnTo>
+                <a:lnTo>
+                  <a:pt x="2117364" y="3325091"/>
+                </a:lnTo>
+                <a:lnTo>
+                  <a:pt x="2087956" y="3325091"/>
+                </a:lnTo>
+                <a:lnTo>
+                  <a:pt x="2058548" y="3325091"/>
+                </a:lnTo>
+                <a:lnTo>
+                  <a:pt x="2029140" y="3325091"/>
+                </a:lnTo>
+                <a:lnTo>
+                  <a:pt x="1999733" y="3325091"/>
+                </a:lnTo>
+                <a:lnTo>
+                  <a:pt x="1970325" y="3325091"/>
+                </a:lnTo>
+                <a:lnTo>
+                  <a:pt x="1940917" y="3325091"/>
+                </a:lnTo>
+                <a:lnTo>
+                  <a:pt x="1911509" y="3325091"/>
+                </a:lnTo>
+                <a:lnTo>
+                  <a:pt x="1882101" y="3325091"/>
+                </a:lnTo>
+                <a:lnTo>
+                  <a:pt x="1852693" y="3325091"/>
+                </a:lnTo>
+                <a:lnTo>
+                  <a:pt x="1823286" y="3325091"/>
+                </a:lnTo>
+                <a:lnTo>
+                  <a:pt x="1793878" y="3325091"/>
+                </a:lnTo>
+                <a:lnTo>
+                  <a:pt x="1764470" y="3325091"/>
+                </a:lnTo>
+                <a:lnTo>
+                  <a:pt x="1735062" y="3325091"/>
+                </a:lnTo>
+                <a:lnTo>
+                  <a:pt x="1705654" y="3325091"/>
+                </a:lnTo>
+                <a:lnTo>
+                  <a:pt x="1676246" y="3325091"/>
+                </a:lnTo>
+                <a:lnTo>
+                  <a:pt x="1646838" y="3325091"/>
+                </a:lnTo>
+                <a:lnTo>
+                  <a:pt x="1617431" y="3325091"/>
+                </a:lnTo>
+                <a:lnTo>
+                  <a:pt x="1588023" y="3325091"/>
+                </a:lnTo>
+                <a:lnTo>
+                  <a:pt x="1558615" y="3325091"/>
+                </a:lnTo>
+                <a:lnTo>
+                  <a:pt x="1529207" y="3325091"/>
+                </a:lnTo>
+                <a:lnTo>
+                  <a:pt x="1499799" y="3325091"/>
+                </a:lnTo>
+                <a:lnTo>
+                  <a:pt x="1470391" y="3325091"/>
+                </a:lnTo>
+                <a:lnTo>
+                  <a:pt x="1440984" y="3325091"/>
+                </a:lnTo>
+                <a:lnTo>
+                  <a:pt x="1411576" y="3325091"/>
+                </a:lnTo>
+                <a:lnTo>
+                  <a:pt x="1382168" y="3325091"/>
+                </a:lnTo>
+                <a:lnTo>
+                  <a:pt x="1352760" y="3325091"/>
+                </a:lnTo>
+                <a:lnTo>
+                  <a:pt x="1323352" y="3325091"/>
+                </a:lnTo>
+                <a:lnTo>
+                  <a:pt x="1293944" y="3325091"/>
+                </a:lnTo>
+                <a:lnTo>
+                  <a:pt x="1264537" y="3325091"/>
+                </a:lnTo>
+                <a:lnTo>
+                  <a:pt x="1235129" y="3325091"/>
+                </a:lnTo>
+                <a:lnTo>
+                  <a:pt x="1205721" y="3325091"/>
+                </a:lnTo>
+                <a:lnTo>
+                  <a:pt x="1176313" y="3325091"/>
+                </a:lnTo>
+                <a:lnTo>
+                  <a:pt x="1146905" y="3325091"/>
+                </a:lnTo>
+                <a:lnTo>
+                  <a:pt x="1117497" y="3325091"/>
+                </a:lnTo>
+                <a:lnTo>
+                  <a:pt x="1088090" y="3325091"/>
+                </a:lnTo>
+                <a:lnTo>
+                  <a:pt x="1058682" y="3325091"/>
+                </a:lnTo>
+                <a:lnTo>
+                  <a:pt x="1029274" y="3325091"/>
+                </a:lnTo>
+                <a:lnTo>
+                  <a:pt x="999866" y="3325091"/>
+                </a:lnTo>
+                <a:lnTo>
+                  <a:pt x="970458" y="3325091"/>
+                </a:lnTo>
+                <a:lnTo>
+                  <a:pt x="941050" y="3325091"/>
+                </a:lnTo>
+                <a:lnTo>
+                  <a:pt x="911643" y="3325091"/>
+                </a:lnTo>
+                <a:lnTo>
+                  <a:pt x="882235" y="3325091"/>
+                </a:lnTo>
+                <a:lnTo>
+                  <a:pt x="852827" y="3325091"/>
+                </a:lnTo>
+                <a:lnTo>
+                  <a:pt x="823419" y="3325091"/>
+                </a:lnTo>
+                <a:lnTo>
+                  <a:pt x="794011" y="3325091"/>
+                </a:lnTo>
+                <a:lnTo>
+                  <a:pt x="764603" y="3325091"/>
+                </a:lnTo>
+                <a:lnTo>
+                  <a:pt x="735195" y="3325091"/>
+                </a:lnTo>
+                <a:lnTo>
+                  <a:pt x="705788" y="3325091"/>
+                </a:lnTo>
+                <a:lnTo>
+                  <a:pt x="676380" y="3325091"/>
+                </a:lnTo>
+                <a:lnTo>
+                  <a:pt x="646972" y="3325091"/>
+                </a:lnTo>
+                <a:lnTo>
+                  <a:pt x="617564" y="3325091"/>
+                </a:lnTo>
+                <a:lnTo>
+                  <a:pt x="588156" y="3325091"/>
+                </a:lnTo>
+                <a:lnTo>
+                  <a:pt x="558748" y="3325091"/>
+                </a:lnTo>
+                <a:lnTo>
+                  <a:pt x="529341" y="3325091"/>
+                </a:lnTo>
+                <a:lnTo>
+                  <a:pt x="499933" y="3325091"/>
+                </a:lnTo>
+                <a:lnTo>
+                  <a:pt x="470525" y="3325091"/>
+                </a:lnTo>
+                <a:lnTo>
+                  <a:pt x="441117" y="3325091"/>
+                </a:lnTo>
+                <a:lnTo>
+                  <a:pt x="411709" y="3325091"/>
+                </a:lnTo>
+                <a:lnTo>
+                  <a:pt x="382301" y="3325091"/>
+                </a:lnTo>
+                <a:lnTo>
+                  <a:pt x="352894" y="3325091"/>
+                </a:lnTo>
+                <a:lnTo>
+                  <a:pt x="323486" y="3325091"/>
+                </a:lnTo>
+                <a:lnTo>
+                  <a:pt x="294078" y="3325091"/>
+                </a:lnTo>
+                <a:lnTo>
+                  <a:pt x="264670" y="3325091"/>
+                </a:lnTo>
+                <a:lnTo>
+                  <a:pt x="235262" y="3325091"/>
+                </a:lnTo>
+                <a:lnTo>
+                  <a:pt x="205854" y="3325091"/>
+                </a:lnTo>
+                <a:lnTo>
+                  <a:pt x="176447" y="3325091"/>
+                </a:lnTo>
+                <a:lnTo>
+                  <a:pt x="147039" y="3325091"/>
+                </a:lnTo>
+                <a:lnTo>
+                  <a:pt x="117631" y="3325091"/>
+                </a:lnTo>
+                <a:lnTo>
+                  <a:pt x="88223" y="3325091"/>
+                </a:lnTo>
+                <a:lnTo>
+                  <a:pt x="58815" y="3325091"/>
+                </a:lnTo>
+                <a:lnTo>
+                  <a:pt x="29407" y="3325091"/>
+                </a:lnTo>
+                <a:lnTo>
+                  <a:pt x="0" y="3325091"/>
+                </a:lnTo>
+                <a:close/>
+              </a:path>
+            </a:pathLst>
+          </a:custGeom>
+          <a:solidFill>
+            <a:srgbClr val="8EDBD4">
+              <a:alpha val="15000"/>
+            </a:srgbClr>
+          </a:solidFill>
+          <a:ln w="10160">
+            <a:solidFill>
+              <a:srgbClr val="8EDBD4">
+                <a:alpha val="15000"/>
+              </a:srgbClr>
+            </a:solidFill>
+          </a:ln>
+          <a:effectLst/>
+        </p:spPr>
+        <p:txBody>
+          <a:bodyPr rtlCol="0" anchor="ctr"/>
+          <a:lstStyle/>
+          <a:p>
+            <a:pPr algn="ctr"/>
+          </a:p>
+        </p:txBody>
+      </p:sp>
+      <p:sp>
+        <p:nvSpPr>
+          <p:cNvPr id="65" name="C2-E01 ellipse 63" descr="sci-ppt:o063"/>
+          <p:cNvSpPr/>
+          <p:nvPr/>
+        </p:nvSpPr>
+        <p:spPr>
+          <a:xfrm>
+            <a:off x="8073320" y="4506045"/>
+            <a:ext cx="146304" cy="146304"/>
+          </a:xfrm>
+          <a:prstGeom prst="ellipse">
+            <a:avLst/>
+          </a:prstGeom>
+          <a:solidFill>
+            <a:srgbClr val="F2B880"/>
+          </a:solidFill>
+          <a:ln w="12700">
+            <a:solidFill>
+              <a:srgbClr val="F2B880"/>
+            </a:solidFill>
+          </a:ln>
+          <a:effectLst/>
+        </p:spPr>
+        <p:txBody>
+          <a:bodyPr rtlCol="0" anchor="ctr"/>
+          <a:lstStyle/>
+          <a:p>
+            <a:pPr algn="ctr"/>
+          </a:p>
+        </p:txBody>
+      </p:sp>
       <p:cxnSp>
         <p:nvCxnSpPr>
-          <p:cNvPr id="13" name="line12" descr="sci-ppt:C2-E01-012"/>
+          <p:cNvPr id="66" name="C2-E01 line 64" descr="sci-ppt:o064"/>
           <p:cNvCxnSpPr/>
           <p:nvPr/>
         </p:nvCxnSpPr>
         <p:spPr>
           <a:xfrm>
-            <a:off x="6748272" y="1536161"/>
-            <a:ext cx="103632" cy="36122"/>
+            <a:off x="8146472" y="1371600"/>
+            <a:ext cx="0" cy="3657600"/>
           </a:xfrm>
           <a:prstGeom prst="line">
             <a:avLst/>
           </a:prstGeom>
-          <a:ln w="25400">
+          <a:ln w="16510">
             <a:solidFill>
-              <a:srgbClr val="8EDBD4"/>
+              <a:srgbClr val="F2B880"/>
             </a:solidFill>
+            <a:prstDash val="dash"/>
           </a:ln>
           <a:effectLst/>
         </p:spPr>
       </p:cxnSp>
-      <p:cxnSp>
-        <p:nvCxnSpPr>
-          <p:cNvPr id="14" name="line13" descr="sci-ppt:C2-E01-013"/>
-          <p:cNvCxnSpPr/>
-          <p:nvPr/>
-        </p:nvCxnSpPr>
-        <p:spPr>
-          <a:xfrm>
-            <a:off x="6851904" y="1572283"/>
-            <a:ext cx="103632" cy="59012"/>
-          </a:xfrm>
-          <a:prstGeom prst="line">
-            <a:avLst/>
-          </a:prstGeom>
-          <a:ln w="25400">
-            <a:solidFill>
-              <a:srgbClr val="8EDBD4"/>
-            </a:solidFill>
-          </a:ln>
-          <a:effectLst/>
-        </p:spPr>
-      </p:cxnSp>
-      <p:cxnSp>
-        <p:nvCxnSpPr>
-          <p:cNvPr id="15" name="line14" descr="sci-ppt:C2-E01-014"/>
-          <p:cNvCxnSpPr/>
-          <p:nvPr/>
-        </p:nvCxnSpPr>
-        <p:spPr>
-          <a:xfrm>
-            <a:off x="6955536" y="1631295"/>
-            <a:ext cx="103632" cy="80178"/>
-          </a:xfrm>
-          <a:prstGeom prst="line">
-            <a:avLst/>
-          </a:prstGeom>
-          <a:ln w="25400">
-            <a:solidFill>
-              <a:srgbClr val="8EDBD4"/>
-            </a:solidFill>
-          </a:ln>
-          <a:effectLst/>
-        </p:spPr>
-      </p:cxnSp>
-      <p:cxnSp>
-        <p:nvCxnSpPr>
-          <p:cNvPr id="16" name="line15" descr="sci-ppt:C2-E01-015"/>
-          <p:cNvCxnSpPr/>
-          <p:nvPr/>
-        </p:nvCxnSpPr>
-        <p:spPr>
-          <a:xfrm>
-            <a:off x="7059168" y="1711473"/>
-            <a:ext cx="103632" cy="99046"/>
-          </a:xfrm>
-          <a:prstGeom prst="line">
-            <a:avLst/>
-          </a:prstGeom>
-          <a:ln w="25400">
-            <a:solidFill>
-              <a:srgbClr val="8EDBD4"/>
-            </a:solidFill>
-          </a:ln>
-          <a:effectLst/>
-        </p:spPr>
-      </p:cxnSp>
-      <p:cxnSp>
-        <p:nvCxnSpPr>
-          <p:cNvPr id="17" name="line16" descr="sci-ppt:C2-E01-016"/>
-          <p:cNvCxnSpPr/>
-          <p:nvPr/>
-        </p:nvCxnSpPr>
-        <p:spPr>
-          <a:xfrm>
-            <a:off x="7162800" y="1810519"/>
-            <a:ext cx="103632" cy="115158"/>
-          </a:xfrm>
-          <a:prstGeom prst="line">
-            <a:avLst/>
-          </a:prstGeom>
-          <a:ln w="25400">
-            <a:solidFill>
-              <a:srgbClr val="8EDBD4"/>
-            </a:solidFill>
-          </a:ln>
-          <a:effectLst/>
-        </p:spPr>
-      </p:cxnSp>
-      <p:cxnSp>
-        <p:nvCxnSpPr>
-          <p:cNvPr id="18" name="line17" descr="sci-ppt:C2-E01-017"/>
-          <p:cNvCxnSpPr/>
-          <p:nvPr/>
-        </p:nvCxnSpPr>
-        <p:spPr>
-          <a:xfrm>
-            <a:off x="7266432" y="1925677"/>
-            <a:ext cx="103632" cy="128176"/>
-          </a:xfrm>
-          <a:prstGeom prst="line">
-            <a:avLst/>
-          </a:prstGeom>
-          <a:ln w="25400">
-            <a:solidFill>
-              <a:srgbClr val="8EDBD4"/>
-            </a:solidFill>
-          </a:ln>
-          <a:effectLst/>
-        </p:spPr>
-      </p:cxnSp>
-      <p:cxnSp>
-        <p:nvCxnSpPr>
-          <p:cNvPr id="19" name="line18" descr="sci-ppt:C2-E01-018"/>
-          <p:cNvCxnSpPr/>
-          <p:nvPr/>
-        </p:nvCxnSpPr>
-        <p:spPr>
-          <a:xfrm>
-            <a:off x="7370064" y="2053853"/>
-            <a:ext cx="103632" cy="137905"/>
-          </a:xfrm>
-          <a:prstGeom prst="line">
-            <a:avLst/>
-          </a:prstGeom>
-          <a:ln w="25400">
-            <a:solidFill>
-              <a:srgbClr val="8EDBD4"/>
-            </a:solidFill>
-          </a:ln>
-          <a:effectLst/>
-        </p:spPr>
-      </p:cxnSp>
-      <p:cxnSp>
-        <p:nvCxnSpPr>
-          <p:cNvPr id="20" name="line19" descr="sci-ppt:C2-E01-019"/>
-          <p:cNvCxnSpPr/>
-          <p:nvPr/>
-        </p:nvCxnSpPr>
-        <p:spPr>
-          <a:xfrm>
-            <a:off x="7473696" y="2191758"/>
-            <a:ext cx="103632" cy="144285"/>
-          </a:xfrm>
-          <a:prstGeom prst="line">
-            <a:avLst/>
-          </a:prstGeom>
-          <a:ln w="25400">
-            <a:solidFill>
-              <a:srgbClr val="8EDBD4"/>
-            </a:solidFill>
-          </a:ln>
-          <a:effectLst/>
-        </p:spPr>
-      </p:cxnSp>
-      <p:cxnSp>
-        <p:nvCxnSpPr>
-          <p:cNvPr id="21" name="line20" descr="sci-ppt:C2-E01-020"/>
-          <p:cNvCxnSpPr/>
-          <p:nvPr/>
-        </p:nvCxnSpPr>
-        <p:spPr>
-          <a:xfrm>
-            <a:off x="7577328" y="2336043"/>
-            <a:ext cx="103632" cy="147392"/>
-          </a:xfrm>
-          <a:prstGeom prst="line">
-            <a:avLst/>
-          </a:prstGeom>
-          <a:ln w="25400">
-            <a:solidFill>
-              <a:srgbClr val="8EDBD4"/>
-            </a:solidFill>
-          </a:ln>
-          <a:effectLst/>
-        </p:spPr>
-      </p:cxnSp>
-      <p:cxnSp>
-        <p:nvCxnSpPr>
-          <p:cNvPr id="22" name="line21" descr="sci-ppt:C2-E01-021"/>
-          <p:cNvCxnSpPr/>
-          <p:nvPr/>
-        </p:nvCxnSpPr>
-        <p:spPr>
-          <a:xfrm>
-            <a:off x="7680960" y="2483435"/>
-            <a:ext cx="103632" cy="147417"/>
-          </a:xfrm>
-          <a:prstGeom prst="line">
-            <a:avLst/>
-          </a:prstGeom>
-          <a:ln w="25400">
-            <a:solidFill>
-              <a:srgbClr val="8EDBD4"/>
-            </a:solidFill>
-          </a:ln>
-          <a:effectLst/>
-        </p:spPr>
-      </p:cxnSp>
-      <p:cxnSp>
-        <p:nvCxnSpPr>
-          <p:cNvPr id="23" name="line22" descr="sci-ppt:C2-E01-022"/>
-          <p:cNvCxnSpPr/>
-          <p:nvPr/>
-        </p:nvCxnSpPr>
-        <p:spPr>
-          <a:xfrm>
-            <a:off x="7784592" y="2630852"/>
-            <a:ext cx="103632" cy="144651"/>
-          </a:xfrm>
-          <a:prstGeom prst="line">
-            <a:avLst/>
-          </a:prstGeom>
-          <a:ln w="25400">
-            <a:solidFill>
-              <a:srgbClr val="8EDBD4"/>
-            </a:solidFill>
-          </a:ln>
-          <a:effectLst/>
-        </p:spPr>
-      </p:cxnSp>
-      <p:cxnSp>
-        <p:nvCxnSpPr>
-          <p:cNvPr id="24" name="line23" descr="sci-ppt:C2-E01-023"/>
-          <p:cNvCxnSpPr/>
-          <p:nvPr/>
-        </p:nvCxnSpPr>
-        <p:spPr>
-          <a:xfrm>
-            <a:off x="7888224" y="2775503"/>
-            <a:ext cx="103632" cy="139464"/>
-          </a:xfrm>
-          <a:prstGeom prst="line">
-            <a:avLst/>
-          </a:prstGeom>
-          <a:ln w="25400">
-            <a:solidFill>
-              <a:srgbClr val="8EDBD4"/>
-            </a:solidFill>
-          </a:ln>
-          <a:effectLst/>
-        </p:spPr>
-      </p:cxnSp>
-      <p:cxnSp>
-        <p:nvCxnSpPr>
-          <p:cNvPr id="25" name="line24" descr="sci-ppt:C2-E01-024"/>
-          <p:cNvCxnSpPr/>
-          <p:nvPr/>
-        </p:nvCxnSpPr>
-        <p:spPr>
-          <a:xfrm>
-            <a:off x="7991856" y="2914967"/>
-            <a:ext cx="103632" cy="132274"/>
-          </a:xfrm>
-          <a:prstGeom prst="line">
-            <a:avLst/>
-          </a:prstGeom>
-          <a:ln w="25400">
-            <a:solidFill>
-              <a:srgbClr val="8EDBD4"/>
-            </a:solidFill>
-          </a:ln>
-          <a:effectLst/>
-        </p:spPr>
-      </p:cxnSp>
-      <p:cxnSp>
-        <p:nvCxnSpPr>
-          <p:cNvPr id="26" name="line25" descr="sci-ppt:C2-E01-025"/>
-          <p:cNvCxnSpPr/>
-          <p:nvPr/>
-        </p:nvCxnSpPr>
-        <p:spPr>
-          <a:xfrm>
-            <a:off x="8095488" y="3047241"/>
-            <a:ext cx="103632" cy="123526"/>
-          </a:xfrm>
-          <a:prstGeom prst="line">
-            <a:avLst/>
-          </a:prstGeom>
-          <a:ln w="25400">
-            <a:solidFill>
-              <a:srgbClr val="8EDBD4"/>
-            </a:solidFill>
-          </a:ln>
-          <a:effectLst/>
-        </p:spPr>
-      </p:cxnSp>
-      <p:cxnSp>
-        <p:nvCxnSpPr>
-          <p:cNvPr id="27" name="line26" descr="sci-ppt:C2-E01-026"/>
-          <p:cNvCxnSpPr/>
-          <p:nvPr/>
-        </p:nvCxnSpPr>
-        <p:spPr>
-          <a:xfrm>
-            <a:off x="8199120" y="3170767"/>
-            <a:ext cx="103632" cy="113666"/>
-          </a:xfrm>
-          <a:prstGeom prst="line">
-            <a:avLst/>
-          </a:prstGeom>
-          <a:ln w="25400">
-            <a:solidFill>
-              <a:srgbClr val="8EDBD4"/>
-            </a:solidFill>
-          </a:ln>
-          <a:effectLst/>
-        </p:spPr>
-      </p:cxnSp>
-      <p:cxnSp>
-        <p:nvCxnSpPr>
-          <p:cNvPr id="28" name="line27" descr="sci-ppt:C2-E01-027"/>
-          <p:cNvCxnSpPr/>
-          <p:nvPr/>
-        </p:nvCxnSpPr>
-        <p:spPr>
-          <a:xfrm>
-            <a:off x="8302752" y="3284433"/>
-            <a:ext cx="103632" cy="103123"/>
-          </a:xfrm>
-          <a:prstGeom prst="line">
-            <a:avLst/>
-          </a:prstGeom>
-          <a:ln w="25400">
-            <a:solidFill>
-              <a:srgbClr val="8EDBD4"/>
-            </a:solidFill>
-          </a:ln>
-          <a:effectLst/>
-        </p:spPr>
-      </p:cxnSp>
-      <p:cxnSp>
-        <p:nvCxnSpPr>
-          <p:cNvPr id="29" name="line28" descr="sci-ppt:C2-E01-028"/>
-          <p:cNvCxnSpPr/>
-          <p:nvPr/>
-        </p:nvCxnSpPr>
-        <p:spPr>
-          <a:xfrm>
-            <a:off x="8406384" y="3387556"/>
-            <a:ext cx="103632" cy="92287"/>
-          </a:xfrm>
-          <a:prstGeom prst="line">
-            <a:avLst/>
-          </a:prstGeom>
-          <a:ln w="25400">
-            <a:solidFill>
-              <a:srgbClr val="8EDBD4"/>
-            </a:solidFill>
-          </a:ln>
-          <a:effectLst/>
-        </p:spPr>
-      </p:cxnSp>
-      <p:cxnSp>
-        <p:nvCxnSpPr>
-          <p:cNvPr id="30" name="line29" descr="sci-ppt:C2-E01-029"/>
-          <p:cNvCxnSpPr/>
-          <p:nvPr/>
-        </p:nvCxnSpPr>
-        <p:spPr>
-          <a:xfrm>
-            <a:off x="8510016" y="3479843"/>
-            <a:ext cx="103632" cy="81502"/>
-          </a:xfrm>
-          <a:prstGeom prst="line">
-            <a:avLst/>
-          </a:prstGeom>
-          <a:ln w="25400">
-            <a:solidFill>
-              <a:srgbClr val="8EDBD4"/>
-            </a:solidFill>
-          </a:ln>
-          <a:effectLst/>
-        </p:spPr>
-      </p:cxnSp>
-      <p:cxnSp>
-        <p:nvCxnSpPr>
-          <p:cNvPr id="31" name="line30" descr="sci-ppt:C2-E01-030"/>
-          <p:cNvCxnSpPr/>
-          <p:nvPr/>
-        </p:nvCxnSpPr>
-        <p:spPr>
-          <a:xfrm>
-            <a:off x="8613648" y="3561345"/>
-            <a:ext cx="103632" cy="71053"/>
-          </a:xfrm>
-          <a:prstGeom prst="line">
-            <a:avLst/>
-          </a:prstGeom>
-          <a:ln w="25400">
-            <a:solidFill>
-              <a:srgbClr val="8EDBD4"/>
-            </a:solidFill>
-          </a:ln>
-          <a:effectLst/>
-        </p:spPr>
-      </p:cxnSp>
-      <p:cxnSp>
-        <p:nvCxnSpPr>
-          <p:cNvPr id="32" name="line31" descr="sci-ppt:C2-E01-031"/>
-          <p:cNvCxnSpPr/>
-          <p:nvPr/>
-        </p:nvCxnSpPr>
-        <p:spPr>
-          <a:xfrm>
-            <a:off x="8717280" y="3632398"/>
-            <a:ext cx="103632" cy="61167"/>
-          </a:xfrm>
-          <a:prstGeom prst="line">
-            <a:avLst/>
-          </a:prstGeom>
-          <a:ln w="25400">
-            <a:solidFill>
-              <a:srgbClr val="8EDBD4"/>
-            </a:solidFill>
-          </a:ln>
-          <a:effectLst/>
-        </p:spPr>
-      </p:cxnSp>
-      <p:cxnSp>
-        <p:nvCxnSpPr>
-          <p:cNvPr id="33" name="line32" descr="sci-ppt:C2-E01-032"/>
-          <p:cNvCxnSpPr/>
-          <p:nvPr/>
-        </p:nvCxnSpPr>
-        <p:spPr>
-          <a:xfrm>
-            <a:off x="8820912" y="3693565"/>
-            <a:ext cx="103632" cy="52008"/>
-          </a:xfrm>
-          <a:prstGeom prst="line">
-            <a:avLst/>
-          </a:prstGeom>
-          <a:ln w="25400">
-            <a:solidFill>
-              <a:srgbClr val="8EDBD4"/>
-            </a:solidFill>
-          </a:ln>
-          <a:effectLst/>
-        </p:spPr>
-      </p:cxnSp>
-      <p:cxnSp>
-        <p:nvCxnSpPr>
-          <p:cNvPr id="34" name="line33" descr="sci-ppt:C2-E01-033"/>
-          <p:cNvCxnSpPr/>
-          <p:nvPr/>
-        </p:nvCxnSpPr>
-        <p:spPr>
-          <a:xfrm>
-            <a:off x="8924544" y="3745573"/>
-            <a:ext cx="103632" cy="43687"/>
-          </a:xfrm>
-          <a:prstGeom prst="line">
-            <a:avLst/>
-          </a:prstGeom>
-          <a:ln w="25400">
-            <a:solidFill>
-              <a:srgbClr val="8EDBD4"/>
-            </a:solidFill>
-          </a:ln>
-          <a:effectLst/>
-        </p:spPr>
-      </p:cxnSp>
-      <p:cxnSp>
-        <p:nvCxnSpPr>
-          <p:cNvPr id="35" name="line34" descr="sci-ppt:C2-E01-034"/>
-          <p:cNvCxnSpPr/>
-          <p:nvPr/>
-        </p:nvCxnSpPr>
-        <p:spPr>
-          <a:xfrm>
-            <a:off x="9028176" y="3789260"/>
-            <a:ext cx="103632" cy="36260"/>
-          </a:xfrm>
-          <a:prstGeom prst="line">
-            <a:avLst/>
-          </a:prstGeom>
-          <a:ln w="25400">
-            <a:solidFill>
-              <a:srgbClr val="8EDBD4"/>
-            </a:solidFill>
-          </a:ln>
-          <a:effectLst/>
-        </p:spPr>
-      </p:cxnSp>
-      <p:cxnSp>
-        <p:nvCxnSpPr>
-          <p:cNvPr id="36" name="line35" descr="sci-ppt:C2-E01-035"/>
-          <p:cNvCxnSpPr/>
-          <p:nvPr/>
-        </p:nvCxnSpPr>
-        <p:spPr>
-          <a:xfrm>
-            <a:off x="9131808" y="3825520"/>
-            <a:ext cx="103632" cy="29744"/>
-          </a:xfrm>
-          <a:prstGeom prst="line">
-            <a:avLst/>
-          </a:prstGeom>
-          <a:ln w="25400">
-            <a:solidFill>
-              <a:srgbClr val="8EDBD4"/>
-            </a:solidFill>
-          </a:ln>
-          <a:effectLst/>
-        </p:spPr>
-      </p:cxnSp>
-      <p:cxnSp>
-        <p:nvCxnSpPr>
-          <p:cNvPr id="37" name="line36" descr="sci-ppt:C2-E01-036"/>
-          <p:cNvCxnSpPr/>
-          <p:nvPr/>
-        </p:nvCxnSpPr>
-        <p:spPr>
-          <a:xfrm>
-            <a:off x="9235440" y="3855264"/>
-            <a:ext cx="103632" cy="24114"/>
-          </a:xfrm>
-          <a:prstGeom prst="line">
-            <a:avLst/>
-          </a:prstGeom>
-          <a:ln w="25400">
-            <a:solidFill>
-              <a:srgbClr val="8EDBD4"/>
-            </a:solidFill>
-          </a:ln>
-          <a:effectLst/>
-        </p:spPr>
-      </p:cxnSp>
-      <p:cxnSp>
-        <p:nvCxnSpPr>
-          <p:cNvPr id="38" name="line37" descr="sci-ppt:C2-E01-037"/>
-          <p:cNvCxnSpPr/>
-          <p:nvPr/>
-        </p:nvCxnSpPr>
-        <p:spPr>
-          <a:xfrm>
-            <a:off x="9339072" y="3879378"/>
-            <a:ext cx="103632" cy="19327"/>
-          </a:xfrm>
-          <a:prstGeom prst="line">
-            <a:avLst/>
-          </a:prstGeom>
-          <a:ln w="25400">
-            <a:solidFill>
-              <a:srgbClr val="8EDBD4"/>
-            </a:solidFill>
-          </a:ln>
-          <a:effectLst/>
-        </p:spPr>
-      </p:cxnSp>
-      <p:cxnSp>
-        <p:nvCxnSpPr>
-          <p:cNvPr id="39" name="line38" descr="sci-ppt:C2-E01-038"/>
-          <p:cNvCxnSpPr/>
-          <p:nvPr/>
-        </p:nvCxnSpPr>
-        <p:spPr>
-          <a:xfrm>
-            <a:off x="9442704" y="3898705"/>
-            <a:ext cx="103632" cy="15314"/>
-          </a:xfrm>
-          <a:prstGeom prst="line">
-            <a:avLst/>
-          </a:prstGeom>
-          <a:ln w="25400">
-            <a:solidFill>
-              <a:srgbClr val="8EDBD4"/>
-            </a:solidFill>
-          </a:ln>
-          <a:effectLst/>
-        </p:spPr>
-      </p:cxnSp>
-      <p:cxnSp>
-        <p:nvCxnSpPr>
-          <p:cNvPr id="40" name="line39" descr="sci-ppt:C2-E01-039"/>
-          <p:cNvCxnSpPr/>
-          <p:nvPr/>
-        </p:nvCxnSpPr>
-        <p:spPr>
-          <a:xfrm>
-            <a:off x="9546336" y="3914019"/>
-            <a:ext cx="103632" cy="11998"/>
-          </a:xfrm>
-          <a:prstGeom prst="line">
-            <a:avLst/>
-          </a:prstGeom>
-          <a:ln w="25400">
-            <a:solidFill>
-              <a:srgbClr val="8EDBD4"/>
-            </a:solidFill>
-          </a:ln>
-          <a:effectLst/>
-        </p:spPr>
-      </p:cxnSp>
-      <p:cxnSp>
-        <p:nvCxnSpPr>
-          <p:cNvPr id="41" name="line40" descr="sci-ppt:C2-E01-040"/>
-          <p:cNvCxnSpPr/>
-          <p:nvPr/>
-        </p:nvCxnSpPr>
-        <p:spPr>
-          <a:xfrm>
-            <a:off x="9649968" y="3926017"/>
-            <a:ext cx="103632" cy="9294"/>
-          </a:xfrm>
-          <a:prstGeom prst="line">
-            <a:avLst/>
-          </a:prstGeom>
-          <a:ln w="25400">
-            <a:solidFill>
-              <a:srgbClr val="8EDBD4"/>
-            </a:solidFill>
-          </a:ln>
-          <a:effectLst/>
-        </p:spPr>
-      </p:cxnSp>
-      <p:cxnSp>
-        <p:nvCxnSpPr>
-          <p:cNvPr id="42" name="line41" descr="sci-ppt:C2-E01-041"/>
-          <p:cNvCxnSpPr/>
-          <p:nvPr/>
-        </p:nvCxnSpPr>
-        <p:spPr>
-          <a:xfrm>
-            <a:off x="9753600" y="3935311"/>
-            <a:ext cx="103632" cy="7121"/>
-          </a:xfrm>
-          <a:prstGeom prst="line">
-            <a:avLst/>
-          </a:prstGeom>
-          <a:ln w="25400">
-            <a:solidFill>
-              <a:srgbClr val="8EDBD4"/>
-            </a:solidFill>
-          </a:ln>
-          <a:effectLst/>
-        </p:spPr>
-      </p:cxnSp>
-      <p:cxnSp>
-        <p:nvCxnSpPr>
-          <p:cNvPr id="43" name="line42" descr="sci-ppt:C2-E01-042"/>
-          <p:cNvCxnSpPr/>
-          <p:nvPr/>
-        </p:nvCxnSpPr>
-        <p:spPr>
-          <a:xfrm>
-            <a:off x="9857232" y="3942432"/>
-            <a:ext cx="103632" cy="5396"/>
-          </a:xfrm>
-          <a:prstGeom prst="line">
-            <a:avLst/>
-          </a:prstGeom>
-          <a:ln w="25400">
-            <a:solidFill>
-              <a:srgbClr val="8EDBD4"/>
-            </a:solidFill>
-          </a:ln>
-          <a:effectLst/>
-        </p:spPr>
-      </p:cxnSp>
-      <p:cxnSp>
-        <p:nvCxnSpPr>
-          <p:cNvPr id="44" name="line43" descr="sci-ppt:C2-E01-043"/>
-          <p:cNvCxnSpPr/>
-          <p:nvPr/>
-        </p:nvCxnSpPr>
-        <p:spPr>
-          <a:xfrm>
-            <a:off x="9960864" y="3947828"/>
-            <a:ext cx="103632" cy="4043"/>
-          </a:xfrm>
-          <a:prstGeom prst="line">
-            <a:avLst/>
-          </a:prstGeom>
-          <a:ln w="25400">
-            <a:solidFill>
-              <a:srgbClr val="8EDBD4"/>
-            </a:solidFill>
-          </a:ln>
-          <a:effectLst/>
-        </p:spPr>
-      </p:cxnSp>
-      <p:cxnSp>
-        <p:nvCxnSpPr>
-          <p:cNvPr id="45" name="line44" descr="sci-ppt:C2-E01-044"/>
-          <p:cNvCxnSpPr/>
-          <p:nvPr/>
-        </p:nvCxnSpPr>
-        <p:spPr>
-          <a:xfrm>
-            <a:off x="10064496" y="3951871"/>
-            <a:ext cx="103632" cy="2997"/>
-          </a:xfrm>
-          <a:prstGeom prst="line">
-            <a:avLst/>
-          </a:prstGeom>
-          <a:ln w="25400">
-            <a:solidFill>
-              <a:srgbClr val="8EDBD4"/>
-            </a:solidFill>
-          </a:ln>
-          <a:effectLst/>
-        </p:spPr>
-      </p:cxnSp>
-      <p:cxnSp>
-        <p:nvCxnSpPr>
-          <p:cNvPr id="46" name="line45" descr="sci-ppt:C2-E01-045"/>
-          <p:cNvCxnSpPr/>
-          <p:nvPr/>
-        </p:nvCxnSpPr>
-        <p:spPr>
-          <a:xfrm>
-            <a:off x="10168128" y="3954868"/>
-            <a:ext cx="103632" cy="2198"/>
-          </a:xfrm>
-          <a:prstGeom prst="line">
-            <a:avLst/>
-          </a:prstGeom>
-          <a:ln w="25400">
-            <a:solidFill>
-              <a:srgbClr val="8EDBD4"/>
-            </a:solidFill>
-          </a:ln>
-          <a:effectLst/>
-        </p:spPr>
-      </p:cxnSp>
-      <p:cxnSp>
-        <p:nvCxnSpPr>
-          <p:cNvPr id="47" name="line46" descr="sci-ppt:C2-E01-046"/>
-          <p:cNvCxnSpPr/>
-          <p:nvPr/>
-        </p:nvCxnSpPr>
-        <p:spPr>
-          <a:xfrm>
-            <a:off x="10271760" y="3957066"/>
-            <a:ext cx="103632" cy="1593"/>
-          </a:xfrm>
-          <a:prstGeom prst="line">
-            <a:avLst/>
-          </a:prstGeom>
-          <a:ln w="25400">
-            <a:solidFill>
-              <a:srgbClr val="8EDBD4"/>
-            </a:solidFill>
-          </a:ln>
-          <a:effectLst/>
-        </p:spPr>
-      </p:cxnSp>
-      <p:cxnSp>
-        <p:nvCxnSpPr>
-          <p:cNvPr id="48" name="line47" descr="sci-ppt:C2-E01-047"/>
-          <p:cNvCxnSpPr/>
-          <p:nvPr/>
-        </p:nvCxnSpPr>
-        <p:spPr>
-          <a:xfrm>
-            <a:off x="10375392" y="3958659"/>
-            <a:ext cx="103632" cy="1144"/>
-          </a:xfrm>
-          <a:prstGeom prst="line">
-            <a:avLst/>
-          </a:prstGeom>
-          <a:ln w="25400">
-            <a:solidFill>
-              <a:srgbClr val="8EDBD4"/>
-            </a:solidFill>
-          </a:ln>
-          <a:effectLst/>
-        </p:spPr>
-      </p:cxnSp>
-      <p:cxnSp>
-        <p:nvCxnSpPr>
-          <p:cNvPr id="49" name="line48" descr="sci-ppt:C2-E01-048"/>
-          <p:cNvCxnSpPr/>
-          <p:nvPr/>
-        </p:nvCxnSpPr>
-        <p:spPr>
-          <a:xfrm>
-            <a:off x="10479024" y="3959803"/>
-            <a:ext cx="103632" cy="812"/>
-          </a:xfrm>
-          <a:prstGeom prst="line">
-            <a:avLst/>
-          </a:prstGeom>
-          <a:ln w="25400">
-            <a:solidFill>
-              <a:srgbClr val="8EDBD4"/>
-            </a:solidFill>
-          </a:ln>
-          <a:effectLst/>
-        </p:spPr>
-      </p:cxnSp>
-      <p:cxnSp>
-        <p:nvCxnSpPr>
-          <p:cNvPr id="50" name="line49" descr="sci-ppt:C2-E01-049"/>
-          <p:cNvCxnSpPr/>
-          <p:nvPr/>
-        </p:nvCxnSpPr>
-        <p:spPr>
-          <a:xfrm>
-            <a:off x="10582656" y="3960615"/>
-            <a:ext cx="103632" cy="570"/>
-          </a:xfrm>
-          <a:prstGeom prst="line">
-            <a:avLst/>
-          </a:prstGeom>
-          <a:ln w="25400">
-            <a:solidFill>
-              <a:srgbClr val="8EDBD4"/>
-            </a:solidFill>
-          </a:ln>
-          <a:effectLst/>
-        </p:spPr>
-      </p:cxnSp>
-      <p:cxnSp>
-        <p:nvCxnSpPr>
-          <p:cNvPr id="51" name="line50" descr="sci-ppt:C2-E01-050"/>
-          <p:cNvCxnSpPr/>
-          <p:nvPr/>
-        </p:nvCxnSpPr>
-        <p:spPr>
-          <a:xfrm>
-            <a:off x="10686288" y="3961185"/>
-            <a:ext cx="103632" cy="397"/>
-          </a:xfrm>
-          <a:prstGeom prst="line">
-            <a:avLst/>
-          </a:prstGeom>
-          <a:ln w="25400">
-            <a:solidFill>
-              <a:srgbClr val="8EDBD4"/>
-            </a:solidFill>
-          </a:ln>
-          <a:effectLst/>
-        </p:spPr>
-      </p:cxnSp>
-      <p:sp>
-        <p:nvSpPr>
-          <p:cNvPr id="52" name="text51" descr="sci-ppt:C2-E01-051"/>
+      <p:sp>
+        <p:nvSpPr>
+          <p:cNvPr id="67" name="C2-E01 text 65" descr="sci-ppt:o065"/>
           <p:cNvSpPr txBox="1"/>
           <p:nvPr/>
         </p:nvSpPr>
         <p:spPr>
           <a:xfrm>
-            <a:off x="7254240" y="1036320"/>
-            <a:ext cx="4267200" cy="340156"/>
+            <a:off x="8283632" y="4076277"/>
+            <a:ext cx="2743200" cy="239395"/>
           </a:xfrm>
           <a:prstGeom prst="rect">
             <a:avLst/>
@@ -4326,7 +7006,7 @@
           <a:effectLst/>
         </p:spPr>
         <p:txBody>
-          <a:bodyPr wrap="none" lIns="27432" rIns="27432" tIns="18288" bIns="18288" anchor="ctr">
+          <a:bodyPr wrap="none" lIns="18288" rIns="18288" tIns="18288" bIns="18288" anchor="t">
             <a:spAutoFit/>
           </a:bodyPr>
           <a:lstStyle/>
@@ -4337,27 +7017,123 @@
               </a:spcAft>
             </a:pPr>
             <a:r>
-              <a:rPr sz="1728" b="0" i="0">
+              <a:rPr sz="1250" b="0" i="0">
+                <a:solidFill>
+                  <a:srgbClr val="F2B880"/>
+                </a:solidFill>
+                <a:latin typeface="Arial"/>
+              </a:rPr>
+              <a:t>r = w:  F = F₀ e⁻² = 0.135 F₀</a:t>
+            </a:r>
+          </a:p>
+        </p:txBody>
+      </p:sp>
+      <p:sp>
+        <p:nvSpPr>
+          <p:cNvPr id="68" name="C2-E01 text 66" descr="sci-ppt:o066"/>
+          <p:cNvSpPr txBox="1"/>
+          <p:nvPr/>
+        </p:nvSpPr>
+        <p:spPr>
+          <a:xfrm>
+            <a:off x="5825559" y="1679170"/>
+            <a:ext cx="2926080" cy="247142"/>
+          </a:xfrm>
+          <a:prstGeom prst="rect">
+            <a:avLst/>
+          </a:prstGeom>
+          <a:noFill/>
+          <a:effectLst/>
+        </p:spPr>
+        <p:txBody>
+          <a:bodyPr wrap="none" lIns="18288" rIns="18288" tIns="18288" bIns="18288" anchor="t">
+            <a:spAutoFit/>
+          </a:bodyPr>
+          <a:lstStyle/>
+          <a:p>
+            <a:pPr algn="l">
+              <a:spcAft>
+                <a:spcPts val="0"/>
+              </a:spcAft>
+            </a:pPr>
+            <a:r>
+              <a:rPr sz="1300" b="0" i="0">
+                <a:solidFill>
+                  <a:srgbClr val="8EDBD4"/>
+                </a:solidFill>
+                <a:latin typeface="Arial"/>
+              </a:rPr>
+              <a:t>F(r) = F₀ exp(−2r²/w²)</a:t>
+            </a:r>
+          </a:p>
+        </p:txBody>
+      </p:sp>
+      <p:sp>
+        <p:nvSpPr>
+          <p:cNvPr id="69" name="C2-E01 text 67" descr="sci-ppt:o067"/>
+          <p:cNvSpPr txBox="1"/>
+          <p:nvPr/>
+        </p:nvSpPr>
+        <p:spPr>
+          <a:xfrm>
+            <a:off x="5486400" y="5733288"/>
+            <a:ext cx="5852160" cy="433070"/>
+          </a:xfrm>
+          <a:prstGeom prst="rect">
+            <a:avLst/>
+          </a:prstGeom>
+          <a:noFill/>
+          <a:effectLst/>
+        </p:spPr>
+        <p:txBody>
+          <a:bodyPr wrap="none" lIns="18288" rIns="18288" tIns="18288" bIns="18288" anchor="t">
+            <a:spAutoFit/>
+          </a:bodyPr>
+          <a:lstStyle/>
+          <a:p>
+            <a:pPr algn="l">
+              <a:spcAft>
+                <a:spcPts val="0"/>
+              </a:spcAft>
+            </a:pPr>
+            <a:r>
+              <a:rPr sz="1250" b="0" i="0">
                 <a:solidFill>
                   <a:srgbClr val="E7F0F3"/>
                 </a:solidFill>
                 <a:latin typeface="Arial"/>
               </a:rPr>
-              <a:t>Gaussian profile (prescribed)</a:t>
-            </a:r>
-          </a:p>
-        </p:txBody>
-      </p:sp>
-      <p:sp>
-        <p:nvSpPr>
-          <p:cNvPr id="53" name="text52" descr="sci-ppt:C2-E01-052"/>
+              <a:t>The same profile is called "radius w" only with this e⁻² definition;</a:t>
+            </a:r>
+          </a:p>
+          <a:p>
+            <a:pPr algn="l">
+              <a:spcAft>
+                <a:spcPts val="0"/>
+              </a:spcAft>
+            </a:pPr>
+            <a:r>
+              <a:rPr sz="1250" b="0" i="0">
+                <a:solidFill>
+                  <a:srgbClr val="E7F0F3"/>
+                </a:solidFill>
+                <a:latin typeface="Arial"/>
+              </a:rPr>
+              <a:t>other conventions differ by √2.</a:t>
+            </a:r>
+          </a:p>
+        </p:txBody>
+      </p:sp>
+      <p:sp>
+        <p:nvSpPr>
+          <p:cNvPr id="70" name="C2-E01 text 68" descr="sci-ppt:o068"/>
           <p:cNvSpPr txBox="1"/>
           <p:nvPr/>
         </p:nvSpPr>
         <p:spPr>
           <a:xfrm>
-            <a:off x="365760" y="4974336"/>
-            <a:ext cx="5547360" cy="321259"/>
+            <a:off x="320040" y="6510528"/>
+            <a:ext cx="11521440" cy="200660"/>
           </a:xfrm>
           <a:prstGeom prst="rect">
             <a:avLst/>
@@ -4366,7 +7142,7 @@
           <a:effectLst/>
         </p:spPr>
         <p:txBody>
-          <a:bodyPr wrap="none" lIns="27432" rIns="27432" tIns="18288" bIns="18288" anchor="ctr">
+          <a:bodyPr wrap="none" lIns="18288" rIns="18288" tIns="18288" bIns="18288" anchor="t">
             <a:spAutoFit/>
           </a:bodyPr>
           <a:lstStyle/>
@@ -4377,173 +7153,13 @@
               </a:spcAft>
             </a:pPr>
             <a:r>
-              <a:rPr sz="1632" b="0" i="0">
-                <a:solidFill>
-                  <a:srgbClr val="E7F0F3"/>
-                </a:solidFill>
-                <a:latin typeface="Arial"/>
-              </a:rPr>
-              <a:t>r: transverse radius</a:t>
-            </a:r>
-          </a:p>
-        </p:txBody>
-      </p:sp>
-      <p:sp>
-        <p:nvSpPr>
-          <p:cNvPr id="54" name="text53" descr="sci-ppt:C2-E01-053"/>
-          <p:cNvSpPr txBox="1"/>
-          <p:nvPr/>
-        </p:nvSpPr>
-        <p:spPr>
-          <a:xfrm>
-            <a:off x="365760" y="5266944"/>
-            <a:ext cx="5547360" cy="321259"/>
-          </a:xfrm>
-          <a:prstGeom prst="rect">
-            <a:avLst/>
-          </a:prstGeom>
-          <a:noFill/>
-          <a:effectLst/>
-        </p:spPr>
-        <p:txBody>
-          <a:bodyPr wrap="none" lIns="27432" rIns="27432" tIns="18288" bIns="18288" anchor="ctr">
-            <a:spAutoFit/>
-          </a:bodyPr>
-          <a:lstStyle/>
-          <a:p>
-            <a:pPr algn="l">
-              <a:spcAft>
-                <a:spcPts val="0"/>
-              </a:spcAft>
-            </a:pPr>
-            <a:r>
-              <a:rPr sz="1632" b="0" i="0">
-                <a:solidFill>
-                  <a:srgbClr val="E7F0F3"/>
-                </a:solidFill>
-                <a:latin typeface="Arial"/>
-              </a:rPr>
-              <a:t>F(r), F₀: fluence</a:t>
-            </a:r>
-          </a:p>
-        </p:txBody>
-      </p:sp>
-      <p:sp>
-        <p:nvSpPr>
-          <p:cNvPr id="55" name="text54" descr="sci-ppt:C2-E01-054"/>
-          <p:cNvSpPr txBox="1"/>
-          <p:nvPr/>
-        </p:nvSpPr>
-        <p:spPr>
-          <a:xfrm>
-            <a:off x="6156960" y="4974336"/>
-            <a:ext cx="5547360" cy="321259"/>
-          </a:xfrm>
-          <a:prstGeom prst="rect">
-            <a:avLst/>
-          </a:prstGeom>
-          <a:noFill/>
-          <a:effectLst/>
-        </p:spPr>
-        <p:txBody>
-          <a:bodyPr wrap="none" lIns="27432" rIns="27432" tIns="18288" bIns="18288" anchor="ctr">
-            <a:spAutoFit/>
-          </a:bodyPr>
-          <a:lstStyle/>
-          <a:p>
-            <a:pPr algn="l">
-              <a:spcAft>
-                <a:spcPts val="0"/>
-              </a:spcAft>
-            </a:pPr>
-            <a:r>
-              <a:rPr sz="1632" b="0" i="0">
-                <a:solidFill>
-                  <a:srgbClr val="E7F0F3"/>
-                </a:solidFill>
-                <a:latin typeface="Arial"/>
-              </a:rPr>
-              <a:t>w: e⁻² beam radius</a:t>
-            </a:r>
-          </a:p>
-        </p:txBody>
-      </p:sp>
-      <p:sp>
-        <p:nvSpPr>
-          <p:cNvPr id="56" name="text55" descr="sci-ppt:C2-E01-055"/>
-          <p:cNvSpPr txBox="1"/>
-          <p:nvPr/>
-        </p:nvSpPr>
-        <p:spPr>
-          <a:xfrm>
-            <a:off x="365760" y="6278880"/>
-            <a:ext cx="11277600" cy="302361"/>
-          </a:xfrm>
-          <a:prstGeom prst="rect">
-            <a:avLst/>
-          </a:prstGeom>
-          <a:noFill/>
-          <a:effectLst/>
-        </p:spPr>
-        <p:txBody>
-          <a:bodyPr wrap="none" lIns="27432" rIns="27432" tIns="18288" bIns="18288" anchor="ctr">
-            <a:spAutoFit/>
-          </a:bodyPr>
-          <a:lstStyle/>
-          <a:p>
-            <a:pPr algn="l">
-              <a:spcAft>
-                <a:spcPts val="0"/>
-              </a:spcAft>
-            </a:pPr>
-            <a:r>
-              <a:rPr sz="1536" b="0" i="0">
+              <a:rPr sz="1000" b="0" i="0">
                 <a:solidFill>
                   <a:srgbClr val="B4C7D2"/>
                 </a:solidFill>
                 <a:latin typeface="Arial"/>
               </a:rPr>
-              <a:t>Beam axis at r = 0</a:t>
-            </a:r>
-          </a:p>
-        </p:txBody>
-      </p:sp>
-      <p:sp>
-        <p:nvSpPr>
-          <p:cNvPr id="57" name="text56" descr="sci-ppt:C2-E01-056"/>
-          <p:cNvSpPr txBox="1"/>
-          <p:nvPr/>
-        </p:nvSpPr>
-        <p:spPr>
-          <a:xfrm>
-            <a:off x="365760" y="6571488"/>
-            <a:ext cx="11277600" cy="302361"/>
-          </a:xfrm>
-          <a:prstGeom prst="rect">
-            <a:avLst/>
-          </a:prstGeom>
-          <a:noFill/>
-          <a:effectLst/>
-        </p:spPr>
-        <p:txBody>
-          <a:bodyPr wrap="none" lIns="27432" rIns="27432" tIns="18288" bIns="18288" anchor="ctr">
-            <a:spAutoFit/>
-          </a:bodyPr>
-          <a:lstStyle/>
-          <a:p>
-            <a:pPr algn="l">
-              <a:spcAft>
-                <a:spcPts val="0"/>
-              </a:spcAft>
-            </a:pPr>
-            <a:r>
-              <a:rPr sz="1536" b="0" i="0">
-                <a:solidFill>
-                  <a:srgbClr val="B4C7D2"/>
-                </a:solidFill>
-                <a:latin typeface="Arial"/>
-              </a:rPr>
-              <a:t>Gaussian profile across the illuminated plane</a:t>
+              <a:t>Gaussian fluence profile of Eq. C2-E01.</a:t>
             </a:r>
           </a:p>
         </p:txBody>
